--- a/Teaching/Compile Time Errrors/problem_session_4_type_state_pattern.pptx
+++ b/Teaching/Compile Time Errrors/problem_session_4_type_state_pattern.pptx
@@ -4,6 +4,9 @@
   <p:sldMasterIdLst>
     <p:sldMasterId id="2147483648" r:id="rId1"/>
   </p:sldMasterIdLst>
+  <p:notesMasterIdLst>
+    <p:notesMasterId r:id="rId9"/>
+  </p:notesMasterIdLst>
   <p:sldIdLst>
     <p:sldId id="256" r:id="rId2"/>
     <p:sldId id="257" r:id="rId3"/>
@@ -13,10 +16,7 @@
     <p:sldId id="261" r:id="rId7"/>
     <p:sldId id="262" r:id="rId8"/>
   </p:sldIdLst>
-  <p:notesMasterIdLst>
-    <p:notesMasterId r:id="rId9"/>
-  </p:notesMasterIdLst>
-  <p:sldSz cx="9144000" cy="5143500"/>
+  <p:sldSz cx="9144000" cy="5143500" type="screen16x9"/>
   <p:notesSz cx="5143500" cy="9144000"/>
   <p:defaultTextStyle>
     <a:lvl1pPr marL="0" algn="l" defTabSz="914400" rtl="0" eaLnBrk="1" latinLnBrk="0" hangingPunct="1">
@@ -110,6 +110,11 @@
       </a:defRPr>
     </a:lvl9pPr>
   </p:defaultTextStyle>
+  <p:extLst>
+    <p:ext uri="{EFAFB233-063F-42B5-8137-9DF3F51BA10A}">
+      <p15:sldGuideLst xmlns:p15="http://schemas.microsoft.com/office/powerpoint/2012/main"/>
+    </p:ext>
+  </p:extLst>
 </p:presentation>
 </file>
 
@@ -135,234 +140,10 @@
           <a:chExt cx="0" cy="0"/>
         </a:xfrm>
       </p:grpSpPr>
-      <p:sp>
-        <p:nvSpPr>
-          <p:cNvPr id="2" name="Header Placeholder 1"/>
-          <p:cNvSpPr>
-            <a:spLocks noGrp="1"/>
-          </p:cNvSpPr>
-          <p:nvPr>
-            <p:ph type="hdr" sz="quarter"/>
-          </p:nvPr>
-        </p:nvSpPr>
-        <p:spPr>
-          <a:xfrm>
-            <a:off x="0" y="0"/>
-            <a:ext cx="2971800" cy="458788"/>
-          </a:xfrm>
-          <a:prstGeom prst="rect">
-            <a:avLst/>
-          </a:prstGeom>
-        </p:spPr>
-        <p:txBody>
-          <a:bodyPr vert="horz" lIns="91440" tIns="45720" rIns="91440" bIns="45720" rtlCol="0"/>
-          <a:lstStyle>
-            <a:lvl1pPr algn="l">
-              <a:defRPr sz="1200"/>
-            </a:lvl1pPr>
-          </a:lstStyle>
-          <a:p>
-            <a:endParaRPr lang="en-US"/>
-          </a:p>
-        </p:txBody>
-      </p:sp>
-      <p:sp>
-        <p:nvSpPr>
-          <p:cNvPr id="3" name="Date Placeholder 2"/>
-          <p:cNvSpPr>
-            <a:spLocks noGrp="1"/>
-          </p:cNvSpPr>
-          <p:nvPr>
-            <p:ph type="dt" idx="1"/>
-          </p:nvPr>
-        </p:nvSpPr>
-        <p:spPr>
-          <a:xfrm>
-            <a:off x="3884613" y="0"/>
-            <a:ext cx="2971800" cy="458788"/>
-          </a:xfrm>
-          <a:prstGeom prst="rect">
-            <a:avLst/>
-          </a:prstGeom>
-        </p:spPr>
-        <p:txBody>
-          <a:bodyPr vert="horz" lIns="91440" tIns="45720" rIns="91440" bIns="45720" rtlCol="0"/>
-          <a:lstStyle>
-            <a:lvl1pPr algn="r">
-              <a:defRPr sz="1200"/>
-            </a:lvl1pPr>
-          </a:lstStyle>
-          <a:p>
-            <a:fld id="{5282F153-3F37-0F45-9E97-73ACFA13230C}" type="datetimeFigureOut">
-              <a:rPr lang="en-US"/>
-              <a:t>7/23/19</a:t>
-            </a:fld>
-            <a:endParaRPr lang="en-US"/>
-          </a:p>
-        </p:txBody>
-      </p:sp>
-      <p:sp>
-        <p:nvSpPr>
-          <p:cNvPr id="4" name="Slide Image Placeholder 3"/>
-          <p:cNvSpPr>
-            <a:spLocks noGrp="1" noRot="1" noChangeAspect="1"/>
-          </p:cNvSpPr>
-          <p:nvPr>
-            <p:ph type="sldImg" idx="2"/>
-          </p:nvPr>
-        </p:nvSpPr>
-        <p:spPr>
-          <a:xfrm>
-            <a:off x="685800" y="1143000"/>
-            <a:ext cx="5486400" cy="3086100"/>
-          </a:xfrm>
-          <a:prstGeom prst="rect">
-            <a:avLst/>
-          </a:prstGeom>
-          <a:noFill/>
-          <a:ln w="12700">
-            <a:solidFill>
-              <a:prstClr val="black"/>
-            </a:solidFill>
-          </a:ln>
-        </p:spPr>
-        <p:txBody>
-          <a:bodyPr vert="horz" lIns="91440" tIns="45720" rIns="91440" bIns="45720" rtlCol="0" anchor="ctr"/>
-          <a:lstStyle/>
-          <a:p>
-            <a:endParaRPr lang="en-US"/>
-          </a:p>
-        </p:txBody>
-      </p:sp>
-      <p:sp>
-        <p:nvSpPr>
-          <p:cNvPr id="5" name="Notes Placeholder 4"/>
-          <p:cNvSpPr>
-            <a:spLocks noGrp="1"/>
-          </p:cNvSpPr>
-          <p:nvPr>
-            <p:ph type="body" sz="quarter" idx="3"/>
-          </p:nvPr>
-        </p:nvSpPr>
-        <p:spPr>
-          <a:xfrm>
-            <a:off x="685800" y="4400550"/>
-            <a:ext cx="5486400" cy="3600450"/>
-          </a:xfrm>
-          <a:prstGeom prst="rect">
-            <a:avLst/>
-          </a:prstGeom>
-        </p:spPr>
-        <p:txBody>
-          <a:bodyPr vert="horz" lIns="91440" tIns="45720" rIns="91440" bIns="45720" rtlCol="0"/>
-          <a:lstStyle/>
-          <a:p>
-            <a:pPr lvl="0"/>
-            <a:r>
-              <a:rPr lang="en-US"/>
-              <a:t>Click to edit Master text styles</a:t>
-            </a:r>
-          </a:p>
-          <a:p>
-            <a:pPr lvl="1"/>
-            <a:r>
-              <a:rPr lang="en-US"/>
-              <a:t>Second level</a:t>
-            </a:r>
-          </a:p>
-          <a:p>
-            <a:pPr lvl="2"/>
-            <a:r>
-              <a:rPr lang="en-US"/>
-              <a:t>Third level</a:t>
-            </a:r>
-          </a:p>
-          <a:p>
-            <a:pPr lvl="3"/>
-            <a:r>
-              <a:rPr lang="en-US"/>
-              <a:t>Fourth level</a:t>
-            </a:r>
-          </a:p>
-          <a:p>
-            <a:pPr lvl="4"/>
-            <a:r>
-              <a:rPr lang="en-US"/>
-              <a:t>Fifth level</a:t>
-            </a:r>
-          </a:p>
-        </p:txBody>
-      </p:sp>
-      <p:sp>
-        <p:nvSpPr>
-          <p:cNvPr id="6" name="Footer Placeholder 5"/>
-          <p:cNvSpPr>
-            <a:spLocks noGrp="1"/>
-          </p:cNvSpPr>
-          <p:nvPr>
-            <p:ph type="ftr" sz="quarter" idx="4"/>
-          </p:nvPr>
-        </p:nvSpPr>
-        <p:spPr>
-          <a:xfrm>
-            <a:off x="0" y="8685213"/>
-            <a:ext cx="2971800" cy="458787"/>
-          </a:xfrm>
-          <a:prstGeom prst="rect">
-            <a:avLst/>
-          </a:prstGeom>
-        </p:spPr>
-        <p:txBody>
-          <a:bodyPr vert="horz" lIns="91440" tIns="45720" rIns="91440" bIns="45720" rtlCol="0" anchor="b"/>
-          <a:lstStyle>
-            <a:lvl1pPr algn="l">
-              <a:defRPr sz="1200"/>
-            </a:lvl1pPr>
-          </a:lstStyle>
-          <a:p>
-            <a:endParaRPr lang="en-US"/>
-          </a:p>
-        </p:txBody>
-      </p:sp>
-      <p:sp>
-        <p:nvSpPr>
-          <p:cNvPr id="7" name="Slide Number Placeholder 6"/>
-          <p:cNvSpPr>
-            <a:spLocks noGrp="1"/>
-          </p:cNvSpPr>
-          <p:nvPr>
-            <p:ph type="sldNum" sz="quarter" idx="5"/>
-          </p:nvPr>
-        </p:nvSpPr>
-        <p:spPr>
-          <a:xfrm>
-            <a:off x="3884613" y="8685213"/>
-            <a:ext cx="2971800" cy="458787"/>
-          </a:xfrm>
-          <a:prstGeom prst="rect">
-            <a:avLst/>
-          </a:prstGeom>
-        </p:spPr>
-        <p:txBody>
-          <a:bodyPr vert="horz" lIns="91440" tIns="45720" rIns="91440" bIns="45720" rtlCol="0" anchor="b"/>
-          <a:lstStyle>
-            <a:lvl1pPr algn="r">
-              <a:defRPr sz="1200"/>
-            </a:lvl1pPr>
-          </a:lstStyle>
-          <a:p>
-            <a:fld id="{CE5E9CC1-C706-0F49-92D6-E571CC5EEA8F}" type="slidenum">
-              <a:rPr lang="en-US"/>
-              <a:t>‹#›</a:t>
-            </a:fld>
-            <a:endParaRPr lang="en-US"/>
-          </a:p>
-        </p:txBody>
-      </p:sp>
     </p:spTree>
     <p:extLst>
       <p:ext uri="{BB962C8B-B14F-4D97-AF65-F5344CB8AC3E}">
-        <p14:creationId xmlns:p14="http://schemas.microsoft.com/office/powerpoint/2010/main" val="1024086991"/>
+        <p14:creationId xmlns:p14="http://schemas.microsoft.com/office/powerpoint/2010/main" val="3800104993"/>
       </p:ext>
     </p:extLst>
   </p:cSld>
@@ -506,10 +287,6 @@
           <a:bodyPr/>
           <a:lstStyle/>
           <a:p>
-            <a:r>
-              <a:rPr lang="en-US" dirty="0"/>
-              <a:t/>
-            </a:r>
             <a:endParaRPr lang="en-US" dirty="0"/>
           </a:p>
         </p:txBody>
@@ -594,10 +371,6 @@
           <a:bodyPr/>
           <a:lstStyle/>
           <a:p>
-            <a:r>
-              <a:rPr lang="en-US" dirty="0"/>
-              <a:t/>
-            </a:r>
             <a:endParaRPr lang="en-US" dirty="0"/>
           </a:p>
         </p:txBody>
@@ -682,10 +455,6 @@
           <a:bodyPr/>
           <a:lstStyle/>
           <a:p>
-            <a:r>
-              <a:rPr lang="en-US" dirty="0"/>
-              <a:t/>
-            </a:r>
             <a:endParaRPr lang="en-US" dirty="0"/>
           </a:p>
         </p:txBody>
@@ -770,10 +539,6 @@
           <a:bodyPr/>
           <a:lstStyle/>
           <a:p>
-            <a:r>
-              <a:rPr lang="en-US" dirty="0"/>
-              <a:t/>
-            </a:r>
             <a:endParaRPr lang="en-US" dirty="0"/>
           </a:p>
         </p:txBody>
@@ -858,10 +623,6 @@
           <a:bodyPr/>
           <a:lstStyle/>
           <a:p>
-            <a:r>
-              <a:rPr lang="en-US" dirty="0"/>
-              <a:t/>
-            </a:r>
             <a:endParaRPr lang="en-US" dirty="0"/>
           </a:p>
         </p:txBody>
@@ -946,10 +707,6 @@
           <a:bodyPr/>
           <a:lstStyle/>
           <a:p>
-            <a:r>
-              <a:rPr lang="en-US" dirty="0"/>
-              <a:t/>
-            </a:r>
             <a:endParaRPr lang="en-US" dirty="0"/>
           </a:p>
         </p:txBody>
@@ -1034,10 +791,6 @@
           <a:bodyPr/>
           <a:lstStyle/>
           <a:p>
-            <a:r>
-              <a:rPr lang="en-US" dirty="0"/>
-              <a:t/>
-            </a:r>
             <a:endParaRPr lang="en-US" dirty="0"/>
           </a:p>
         </p:txBody>
@@ -1111,6 +864,11 @@
 <file path=ppt/slideMasters/slideMaster1.xml><?xml version="1.0" encoding="utf-8"?>
 <p:sldMaster xmlns:a="http://schemas.openxmlformats.org/drawingml/2006/main" xmlns:r="http://schemas.openxmlformats.org/officeDocument/2006/relationships" xmlns:p="http://schemas.openxmlformats.org/presentationml/2006/main">
   <p:cSld>
+    <p:bg>
+      <p:bgRef idx="1001">
+        <a:schemeClr val="bg1"/>
+      </p:bgRef>
+    </p:bg>
     <p:spTree>
       <p:nvGrpSpPr>
         <p:cNvPr id="1" name=""/>
@@ -1393,6 +1151,7 @@
         <a:solidFill>
           <a:srgbClr val="0D1117"/>
         </a:solidFill>
+        <a:effectLst/>
       </p:bgPr>
     </p:bg>
     <p:spTree>
@@ -1430,7 +1189,7 @@
           <a:bodyPr wrap="square" rtlCol="0" anchor="ctr"/>
           <a:lstStyle/>
           <a:p>
-            <a:pPr algn="ctr" indent="0" marL="0">
+            <a:pPr marL="0" indent="0" algn="ctr">
               <a:buNone/>
             </a:pPr>
             <a:r>
@@ -1466,7 +1225,7 @@
           <a:bodyPr wrap="square" rtlCol="0" anchor="ctr"/>
           <a:lstStyle/>
           <a:p>
-            <a:pPr algn="ctr" indent="0" marL="0">
+            <a:pPr marL="0" indent="0" algn="ctr">
               <a:buNone/>
             </a:pPr>
             <a:r>
@@ -1502,7 +1261,7 @@
           <a:bodyPr wrap="square" rtlCol="0" anchor="ctr"/>
           <a:lstStyle/>
           <a:p>
-            <a:pPr algn="ctr" indent="0" marL="0">
+            <a:pPr marL="0" indent="0" algn="ctr">
               <a:buNone/>
             </a:pPr>
             <a:r>
@@ -1536,6 +1295,13 @@
           </a:solidFill>
           <a:ln/>
         </p:spPr>
+        <p:txBody>
+          <a:bodyPr/>
+          <a:lstStyle/>
+          <a:p>
+            <a:endParaRPr/>
+          </a:p>
+        </p:txBody>
       </p:sp>
     </p:spTree>
   </p:cSld>
@@ -1553,6 +1319,7 @@
         <a:solidFill>
           <a:srgbClr val="0D1117"/>
         </a:solidFill>
+        <a:effectLst/>
       </p:bgPr>
     </p:bg>
     <p:spTree>
@@ -1590,7 +1357,7 @@
           <a:bodyPr wrap="square" rtlCol="0" anchor="ctr"/>
           <a:lstStyle/>
           <a:p>
-            <a:pPr indent="0" marL="0">
+            <a:pPr marL="0" indent="0">
               <a:buNone/>
             </a:pPr>
             <a:r>
@@ -1629,7 +1396,7 @@
           <a:bodyPr wrap="square" rtlCol="0" anchor="ctr"/>
           <a:lstStyle/>
           <a:p>
-            <a:pPr indent="0" marL="0">
+            <a:pPr marL="0" indent="0">
               <a:buNone/>
             </a:pPr>
             <a:r>
@@ -1655,7 +1422,7 @@
         </p:nvSpPr>
         <p:spPr>
           <a:xfrm>
-            <a:off x="365760" y="1005840"/>
+            <a:off x="365760" y="1053251"/>
             <a:ext cx="4572000" cy="2651760"/>
           </a:xfrm>
           <a:prstGeom prst="rect">
@@ -1671,6 +1438,13 @@
             <a:prstDash val="solid"/>
           </a:ln>
         </p:spPr>
+        <p:txBody>
+          <a:bodyPr/>
+          <a:lstStyle/>
+          <a:p>
+            <a:endParaRPr/>
+          </a:p>
+        </p:txBody>
       </p:sp>
       <p:sp>
         <p:nvSpPr>
@@ -1680,7 +1454,7 @@
         </p:nvSpPr>
         <p:spPr>
           <a:xfrm>
-            <a:off x="365760" y="1005840"/>
+            <a:off x="365760" y="1053251"/>
             <a:ext cx="36576" cy="2651760"/>
           </a:xfrm>
           <a:prstGeom prst="rect">
@@ -1691,6 +1465,13 @@
           </a:solidFill>
           <a:ln/>
         </p:spPr>
+        <p:txBody>
+          <a:bodyPr/>
+          <a:lstStyle/>
+          <a:p>
+            <a:endParaRPr/>
+          </a:p>
+        </p:txBody>
       </p:sp>
       <p:sp>
         <p:nvSpPr>
@@ -1700,7 +1481,7 @@
         </p:nvSpPr>
         <p:spPr>
           <a:xfrm>
-            <a:off x="502920" y="1097280"/>
+            <a:off x="502920" y="1144691"/>
             <a:ext cx="4343400" cy="2468880"/>
           </a:xfrm>
           <a:prstGeom prst="rect">
@@ -1713,7 +1494,7 @@
           <a:bodyPr wrap="square" rtlCol="0" anchor="t"/>
           <a:lstStyle/>
           <a:p>
-            <a:pPr indent="0" marL="0">
+            <a:pPr marL="0" indent="0">
               <a:buNone/>
             </a:pPr>
             <a:r>
@@ -1730,7 +1511,7 @@
             <a:endParaRPr lang="en-US" sz="900" dirty="0"/>
           </a:p>
           <a:p>
-            <a:pPr indent="0" marL="0">
+            <a:pPr marL="0" indent="0">
               <a:buNone/>
             </a:pPr>
             <a:r>
@@ -1747,7 +1528,7 @@
             <a:endParaRPr lang="en-US" sz="900" dirty="0"/>
           </a:p>
           <a:p>
-            <a:pPr indent="0" marL="0">
+            <a:pPr marL="0" indent="0">
               <a:buNone/>
             </a:pPr>
             <a:r>
@@ -1764,7 +1545,7 @@
             <a:endParaRPr lang="en-US" sz="900" dirty="0"/>
           </a:p>
           <a:p>
-            <a:pPr indent="0" marL="0">
+            <a:pPr marL="0" indent="0">
               <a:buNone/>
             </a:pPr>
             <a:r>
@@ -1781,7 +1562,7 @@
             <a:endParaRPr lang="en-US" sz="900" dirty="0"/>
           </a:p>
           <a:p>
-            <a:pPr indent="0" marL="0">
+            <a:pPr marL="0" indent="0">
               <a:buNone/>
             </a:pPr>
             <a:r>
@@ -1798,7 +1579,7 @@
             <a:endParaRPr lang="en-US" sz="900" dirty="0"/>
           </a:p>
           <a:p>
-            <a:pPr indent="0" marL="0">
+            <a:pPr marL="0" indent="0">
               <a:buNone/>
             </a:pPr>
             <a:r>
@@ -1815,7 +1596,7 @@
             <a:endParaRPr lang="en-US" sz="900" dirty="0"/>
           </a:p>
           <a:p>
-            <a:pPr indent="0" marL="0">
+            <a:pPr marL="0" indent="0">
               <a:buNone/>
             </a:pPr>
             <a:r>
@@ -1832,7 +1613,7 @@
             <a:endParaRPr lang="en-US" sz="900" dirty="0"/>
           </a:p>
           <a:p>
-            <a:pPr indent="0" marL="0">
+            <a:pPr marL="0" indent="0">
               <a:buNone/>
             </a:pPr>
             <a:r>
@@ -1849,7 +1630,7 @@
             <a:endParaRPr lang="en-US" sz="900" dirty="0"/>
           </a:p>
           <a:p>
-            <a:pPr indent="0" marL="0">
+            <a:pPr marL="0" indent="0">
               <a:buNone/>
             </a:pPr>
             <a:r>
@@ -1866,7 +1647,7 @@
             <a:endParaRPr lang="en-US" sz="900" dirty="0"/>
           </a:p>
           <a:p>
-            <a:pPr indent="0" marL="0">
+            <a:pPr marL="0" indent="0">
               <a:buNone/>
             </a:pPr>
             <a:r>
@@ -1883,7 +1664,7 @@
             <a:endParaRPr lang="en-US" sz="900" dirty="0"/>
           </a:p>
           <a:p>
-            <a:pPr indent="0" marL="0">
+            <a:pPr marL="0" indent="0">
               <a:buNone/>
             </a:pPr>
             <a:r>
@@ -1900,13 +1681,13 @@
             <a:endParaRPr lang="en-US" sz="900" dirty="0"/>
           </a:p>
           <a:p>
-            <a:pPr indent="0" marL="0">
-              <a:buNone/>
-            </a:pPr>
-            <a:endParaRPr lang="en-US" sz="900" dirty="0"/>
-          </a:p>
-          <a:p>
-            <a:pPr indent="0" marL="0">
+            <a:pPr marL="0" indent="0">
+              <a:buNone/>
+            </a:pPr>
+            <a:endParaRPr lang="en-US" sz="900" dirty="0"/>
+          </a:p>
+          <a:p>
+            <a:pPr marL="0" indent="0">
               <a:buNone/>
             </a:pPr>
             <a:r>
@@ -1923,7 +1704,7 @@
             <a:endParaRPr lang="en-US" sz="900" dirty="0"/>
           </a:p>
           <a:p>
-            <a:pPr indent="0" marL="0">
+            <a:pPr marL="0" indent="0">
               <a:buNone/>
             </a:pPr>
             <a:r>
@@ -1949,7 +1730,7 @@
         </p:nvSpPr>
         <p:spPr>
           <a:xfrm>
-            <a:off x="5120640" y="1005840"/>
+            <a:off x="5120640" y="1066799"/>
             <a:ext cx="3657600" cy="1828800"/>
           </a:xfrm>
           <a:prstGeom prst="rect">
@@ -1965,6 +1746,13 @@
             <a:prstDash val="solid"/>
           </a:ln>
         </p:spPr>
+        <p:txBody>
+          <a:bodyPr/>
+          <a:lstStyle/>
+          <a:p>
+            <a:endParaRPr/>
+          </a:p>
+        </p:txBody>
       </p:sp>
       <p:sp>
         <p:nvSpPr>
@@ -1974,7 +1762,7 @@
         </p:nvSpPr>
         <p:spPr>
           <a:xfrm>
-            <a:off x="5257800" y="1097280"/>
+            <a:off x="5257800" y="1158239"/>
             <a:ext cx="3383280" cy="228600"/>
           </a:xfrm>
           <a:prstGeom prst="rect">
@@ -1987,7 +1775,7 @@
           <a:bodyPr wrap="square" rtlCol="0" anchor="ctr"/>
           <a:lstStyle/>
           <a:p>
-            <a:pPr indent="0" marL="0">
+            <a:pPr marL="0" indent="0">
               <a:buNone/>
             </a:pPr>
             <a:r>
@@ -2010,7 +1798,7 @@
         </p:nvSpPr>
         <p:spPr>
           <a:xfrm>
-            <a:off x="5257800" y="1371600"/>
+            <a:off x="5257800" y="1432559"/>
             <a:ext cx="3383280" cy="1371600"/>
           </a:xfrm>
           <a:prstGeom prst="rect">
@@ -2023,7 +1811,7 @@
           <a:bodyPr wrap="square" rtlCol="0" anchor="t"/>
           <a:lstStyle/>
           <a:p>
-            <a:pPr indent="0" marL="0">
+            <a:pPr marL="0" indent="0">
               <a:buNone/>
             </a:pPr>
             <a:r>
@@ -2037,7 +1825,7 @@
             <a:endParaRPr lang="en-US" sz="1100" dirty="0"/>
           </a:p>
           <a:p>
-            <a:pPr indent="0" marL="0">
+            <a:pPr marL="0" indent="0">
               <a:buNone/>
             </a:pPr>
             <a:r>
@@ -2051,7 +1839,7 @@
             <a:endParaRPr lang="en-US" sz="1100" dirty="0"/>
           </a:p>
           <a:p>
-            <a:pPr indent="0" marL="0">
+            <a:pPr marL="0" indent="0">
               <a:buNone/>
             </a:pPr>
             <a:r>
@@ -2065,7 +1853,7 @@
             <a:endParaRPr lang="en-US" sz="1100" dirty="0"/>
           </a:p>
           <a:p>
-            <a:pPr indent="0" marL="0">
+            <a:pPr marL="0" indent="0">
               <a:buNone/>
             </a:pPr>
             <a:r>
@@ -2079,13 +1867,13 @@
             <a:endParaRPr lang="en-US" sz="1100" dirty="0"/>
           </a:p>
           <a:p>
-            <a:pPr indent="0" marL="0">
+            <a:pPr marL="0" indent="0">
               <a:buNone/>
             </a:pPr>
             <a:endParaRPr lang="en-US" sz="1100" dirty="0"/>
           </a:p>
           <a:p>
-            <a:pPr indent="0" marL="0">
+            <a:pPr marL="0" indent="0">
               <a:buNone/>
             </a:pPr>
             <a:r>
@@ -2108,7 +1896,7 @@
         </p:nvSpPr>
         <p:spPr>
           <a:xfrm>
-            <a:off x="5120640" y="2926080"/>
+            <a:off x="5120640" y="2987039"/>
             <a:ext cx="3657600" cy="548640"/>
           </a:xfrm>
           <a:prstGeom prst="rect">
@@ -2119,6 +1907,13 @@
           </a:solidFill>
           <a:ln/>
         </p:spPr>
+        <p:txBody>
+          <a:bodyPr/>
+          <a:lstStyle/>
+          <a:p>
+            <a:endParaRPr/>
+          </a:p>
+        </p:txBody>
       </p:sp>
       <p:sp>
         <p:nvSpPr>
@@ -2128,7 +1923,7 @@
         </p:nvSpPr>
         <p:spPr>
           <a:xfrm>
-            <a:off x="5257800" y="2999232"/>
+            <a:off x="5257800" y="3060191"/>
             <a:ext cx="3383280" cy="411480"/>
           </a:xfrm>
           <a:prstGeom prst="rect">
@@ -2141,7 +1936,7 @@
           <a:bodyPr wrap="square" rtlCol="0" anchor="ctr"/>
           <a:lstStyle/>
           <a:p>
-            <a:pPr indent="0" marL="0">
+            <a:pPr marL="0" indent="0">
               <a:buNone/>
             </a:pPr>
             <a:r>
@@ -2155,7 +1950,7 @@
             <a:endParaRPr lang="en-US" sz="900" dirty="0"/>
           </a:p>
           <a:p>
-            <a:pPr indent="0" marL="0">
+            <a:pPr marL="0" indent="0">
               <a:buNone/>
             </a:pPr>
             <a:r>
@@ -2186,6 +1981,7 @@
         <a:solidFill>
           <a:srgbClr val="0D1117"/>
         </a:solidFill>
+        <a:effectLst/>
       </p:bgPr>
     </p:bg>
     <p:spTree>
@@ -2223,7 +2019,7 @@
           <a:bodyPr wrap="square" rtlCol="0" anchor="ctr"/>
           <a:lstStyle/>
           <a:p>
-            <a:pPr indent="0" marL="0">
+            <a:pPr marL="0" indent="0">
               <a:buNone/>
             </a:pPr>
             <a:r>
@@ -2262,7 +2058,7 @@
           <a:bodyPr wrap="square" rtlCol="0" anchor="ctr"/>
           <a:lstStyle/>
           <a:p>
-            <a:pPr indent="0" marL="0">
+            <a:pPr marL="0" indent="0">
               <a:buNone/>
             </a:pPr>
             <a:r>
@@ -2301,6 +2097,13 @@
             <a:prstDash val="solid"/>
           </a:ln>
         </p:spPr>
+        <p:txBody>
+          <a:bodyPr/>
+          <a:lstStyle/>
+          <a:p>
+            <a:endParaRPr/>
+          </a:p>
+        </p:txBody>
       </p:sp>
       <p:sp>
         <p:nvSpPr>
@@ -2321,6 +2124,13 @@
           </a:solidFill>
           <a:ln/>
         </p:spPr>
+        <p:txBody>
+          <a:bodyPr/>
+          <a:lstStyle/>
+          <a:p>
+            <a:endParaRPr/>
+          </a:p>
+        </p:txBody>
       </p:sp>
       <p:sp>
         <p:nvSpPr>
@@ -2343,7 +2153,7 @@
           <a:bodyPr wrap="square" rtlCol="0" anchor="t"/>
           <a:lstStyle/>
           <a:p>
-            <a:pPr indent="0" marL="0">
+            <a:pPr marL="0" indent="0">
               <a:buNone/>
             </a:pPr>
             <a:r>
@@ -2360,7 +2170,7 @@
             <a:endParaRPr lang="en-US" sz="900" dirty="0"/>
           </a:p>
           <a:p>
-            <a:pPr indent="0" marL="0">
+            <a:pPr marL="0" indent="0">
               <a:buNone/>
             </a:pPr>
             <a:r>
@@ -2377,7 +2187,7 @@
             <a:endParaRPr lang="en-US" sz="900" dirty="0"/>
           </a:p>
           <a:p>
-            <a:pPr indent="0" marL="0">
+            <a:pPr marL="0" indent="0">
               <a:buNone/>
             </a:pPr>
             <a:r>
@@ -2394,7 +2204,7 @@
             <a:endParaRPr lang="en-US" sz="900" dirty="0"/>
           </a:p>
           <a:p>
-            <a:pPr indent="0" marL="0">
+            <a:pPr marL="0" indent="0">
               <a:buNone/>
             </a:pPr>
             <a:r>
@@ -2411,7 +2221,7 @@
             <a:endParaRPr lang="en-US" sz="900" dirty="0"/>
           </a:p>
           <a:p>
-            <a:pPr indent="0" marL="0">
+            <a:pPr marL="0" indent="0">
               <a:buNone/>
             </a:pPr>
             <a:r>
@@ -2428,7 +2238,7 @@
             <a:endParaRPr lang="en-US" sz="900" dirty="0"/>
           </a:p>
           <a:p>
-            <a:pPr indent="0" marL="0">
+            <a:pPr marL="0" indent="0">
               <a:buNone/>
             </a:pPr>
             <a:r>
@@ -2467,7 +2277,7 @@
           <a:bodyPr wrap="square" rtlCol="0" anchor="ctr"/>
           <a:lstStyle/>
           <a:p>
-            <a:pPr indent="0" marL="0">
+            <a:pPr marL="0" indent="0">
               <a:buNone/>
             </a:pPr>
             <a:r>
@@ -2506,6 +2316,13 @@
             <a:prstDash val="solid"/>
           </a:ln>
         </p:spPr>
+        <p:txBody>
+          <a:bodyPr/>
+          <a:lstStyle/>
+          <a:p>
+            <a:endParaRPr/>
+          </a:p>
+        </p:txBody>
       </p:sp>
       <p:sp>
         <p:nvSpPr>
@@ -2526,6 +2343,13 @@
           </a:solidFill>
           <a:ln/>
         </p:spPr>
+        <p:txBody>
+          <a:bodyPr/>
+          <a:lstStyle/>
+          <a:p>
+            <a:endParaRPr/>
+          </a:p>
+        </p:txBody>
       </p:sp>
       <p:sp>
         <p:nvSpPr>
@@ -2548,7 +2372,7 @@
           <a:bodyPr wrap="square" rtlCol="0" anchor="t"/>
           <a:lstStyle/>
           <a:p>
-            <a:pPr indent="0" marL="0">
+            <a:pPr marL="0" indent="0">
               <a:buNone/>
             </a:pPr>
             <a:r>
@@ -2565,7 +2389,7 @@
             <a:endParaRPr lang="en-US" sz="900" dirty="0"/>
           </a:p>
           <a:p>
-            <a:pPr indent="0" marL="0">
+            <a:pPr marL="0" indent="0">
               <a:buNone/>
             </a:pPr>
             <a:r>
@@ -2582,7 +2406,7 @@
             <a:endParaRPr lang="en-US" sz="900" dirty="0"/>
           </a:p>
           <a:p>
-            <a:pPr indent="0" marL="0">
+            <a:pPr marL="0" indent="0">
               <a:buNone/>
             </a:pPr>
             <a:r>
@@ -2599,7 +2423,7 @@
             <a:endParaRPr lang="en-US" sz="900" dirty="0"/>
           </a:p>
           <a:p>
-            <a:pPr indent="0" marL="0">
+            <a:pPr marL="0" indent="0">
               <a:buNone/>
             </a:pPr>
             <a:r>
@@ -2616,13 +2440,13 @@
             <a:endParaRPr lang="en-US" sz="900" dirty="0"/>
           </a:p>
           <a:p>
-            <a:pPr indent="0" marL="0">
-              <a:buNone/>
-            </a:pPr>
-            <a:endParaRPr lang="en-US" sz="900" dirty="0"/>
-          </a:p>
-          <a:p>
-            <a:pPr indent="0" marL="0">
+            <a:pPr marL="0" indent="0">
+              <a:buNone/>
+            </a:pPr>
+            <a:endParaRPr lang="en-US" sz="900" dirty="0"/>
+          </a:p>
+          <a:p>
+            <a:pPr marL="0" indent="0">
               <a:buNone/>
             </a:pPr>
             <a:r>
@@ -2639,7 +2463,7 @@
             <a:endParaRPr lang="en-US" sz="900" dirty="0"/>
           </a:p>
           <a:p>
-            <a:pPr indent="0" marL="0">
+            <a:pPr marL="0" indent="0">
               <a:buNone/>
             </a:pPr>
             <a:r>
@@ -2676,6 +2500,13 @@
           </a:solidFill>
           <a:ln/>
         </p:spPr>
+        <p:txBody>
+          <a:bodyPr/>
+          <a:lstStyle/>
+          <a:p>
+            <a:endParaRPr/>
+          </a:p>
+        </p:txBody>
       </p:sp>
       <p:sp>
         <p:nvSpPr>
@@ -2696,6 +2527,13 @@
           </a:solidFill>
           <a:ln/>
         </p:spPr>
+        <p:txBody>
+          <a:bodyPr/>
+          <a:lstStyle/>
+          <a:p>
+            <a:endParaRPr/>
+          </a:p>
+        </p:txBody>
       </p:sp>
       <p:sp>
         <p:nvSpPr>
@@ -2718,7 +2556,7 @@
           <a:bodyPr wrap="square" rtlCol="0" anchor="ctr"/>
           <a:lstStyle/>
           <a:p>
-            <a:pPr indent="0" marL="0">
+            <a:pPr marL="0" indent="0">
               <a:buNone/>
             </a:pPr>
             <a:r>
@@ -2754,74 +2592,62 @@
           <a:bodyPr wrap="square" rtlCol="0" anchor="ctr"/>
           <a:lstStyle/>
           <a:p>
-            <a:pPr indent="0" marL="0">
-              <a:buNone/>
-            </a:pPr>
-            <a:r>
-              <a:rPr lang="en-US" sz="1100" dirty="0">
-                <a:solidFill>
-                  <a:srgbClr val="E6EDF3"/>
+            <a:r>
+              <a:rPr sz="1400" dirty="0">
+                <a:solidFill>
+                  <a:schemeClr val="bg2"/>
                 </a:solidFill>
               </a:rPr>
               <a:t>• States are TYPES, not values</a:t>
             </a:r>
-            <a:endParaRPr lang="en-US" sz="1100" dirty="0"/>
-          </a:p>
-          <a:p>
-            <a:pPr indent="0" marL="0">
-              <a:buNone/>
-            </a:pPr>
-            <a:r>
-              <a:rPr lang="en-US" sz="1100" dirty="0">
-                <a:solidFill>
-                  <a:srgbClr val="E6EDF3"/>
+          </a:p>
+          <a:p>
+            <a:r>
+              <a:rPr sz="1400" dirty="0">
+                <a:solidFill>
+                  <a:schemeClr val="bg2"/>
                 </a:solidFill>
               </a:rPr>
               <a:t>• Operations exist only on valid state types</a:t>
             </a:r>
-            <a:endParaRPr lang="en-US" sz="1100" dirty="0"/>
-          </a:p>
-          <a:p>
-            <a:pPr indent="0" marL="0">
-              <a:buNone/>
-            </a:pPr>
-            <a:r>
-              <a:rPr lang="en-US" sz="1100" dirty="0">
-                <a:solidFill>
-                  <a:srgbClr val="E6EDF3"/>
+          </a:p>
+          <a:p>
+            <a:r>
+              <a:rPr sz="1400" dirty="0">
+                <a:solidFill>
+                  <a:schemeClr val="bg2"/>
                 </a:solidFill>
               </a:rPr>
               <a:t>• Transitions consume old type, produce new type</a:t>
             </a:r>
-            <a:endParaRPr lang="en-US" sz="1100" dirty="0"/>
-          </a:p>
-          <a:p>
-            <a:pPr indent="0" marL="0">
-              <a:buNone/>
-            </a:pPr>
-            <a:r>
-              <a:rPr lang="en-US" sz="1100" dirty="0">
-                <a:solidFill>
-                  <a:srgbClr val="E6EDF3"/>
+          </a:p>
+          <a:p>
+            <a:r>
+              <a:rPr sz="1400" dirty="0">
+                <a:solidFill>
+                  <a:schemeClr val="bg2"/>
                 </a:solidFill>
               </a:rPr>
               <a:t>• Invalid operations → compile error</a:t>
             </a:r>
-            <a:endParaRPr lang="en-US" sz="1100" dirty="0"/>
-          </a:p>
-          <a:p>
-            <a:pPr indent="0" marL="0">
-              <a:buNone/>
-            </a:pPr>
-            <a:r>
-              <a:rPr lang="en-US" sz="1100" dirty="0">
-                <a:solidFill>
-                  <a:srgbClr val="E6EDF3"/>
-                </a:solidFill>
-              </a:rPr>
-              <a:t>• No runtime checks needed</a:t>
-            </a:r>
-            <a:endParaRPr lang="en-US" sz="1100" dirty="0"/>
+          </a:p>
+          <a:p>
+            <a:r>
+              <a:rPr sz="1400" dirty="0">
+                <a:solidFill>
+                  <a:schemeClr val="bg2"/>
+                </a:solidFill>
+              </a:rPr>
+              <a:t>• No runtime state checks for protocol validity (but moved-from misuse is still possible</a:t>
+            </a:r>
+            <a:r>
+              <a:rPr dirty="0">
+                <a:solidFill>
+                  <a:schemeClr val="bg2"/>
+                </a:solidFill>
+              </a:rPr>
+              <a:t>)</a:t>
+            </a:r>
           </a:p>
         </p:txBody>
       </p:sp>
@@ -2844,6 +2670,13 @@
           </a:solidFill>
           <a:ln/>
         </p:spPr>
+        <p:txBody>
+          <a:bodyPr/>
+          <a:lstStyle/>
+          <a:p>
+            <a:endParaRPr/>
+          </a:p>
+        </p:txBody>
       </p:sp>
       <p:sp>
         <p:nvSpPr>
@@ -2866,7 +2699,7 @@
           <a:bodyPr wrap="square" rtlCol="0" anchor="ctr"/>
           <a:lstStyle/>
           <a:p>
-            <a:pPr indent="0" marL="0">
+            <a:pPr marL="0" indent="0">
               <a:buNone/>
             </a:pPr>
             <a:r>
@@ -2880,7 +2713,7 @@
             <a:endParaRPr lang="en-US" sz="1000" dirty="0"/>
           </a:p>
           <a:p>
-            <a:pPr indent="0" marL="0">
+            <a:pPr marL="0" indent="0">
               <a:buNone/>
             </a:pPr>
             <a:r>
@@ -2911,6 +2744,7 @@
         <a:solidFill>
           <a:srgbClr val="0D1117"/>
         </a:solidFill>
+        <a:effectLst/>
       </p:bgPr>
     </p:bg>
     <p:spTree>
@@ -2948,7 +2782,7 @@
           <a:bodyPr wrap="square" rtlCol="0" anchor="ctr"/>
           <a:lstStyle/>
           <a:p>
-            <a:pPr indent="0" marL="0">
+            <a:pPr marL="0" indent="0">
               <a:buNone/>
             </a:pPr>
             <a:r>
@@ -2987,7 +2821,7 @@
           <a:bodyPr wrap="square" rtlCol="0" anchor="ctr"/>
           <a:lstStyle/>
           <a:p>
-            <a:pPr indent="0" marL="0">
+            <a:pPr marL="0" indent="0">
               <a:buNone/>
             </a:pPr>
             <a:r>
@@ -3026,6 +2860,13 @@
             <a:prstDash val="solid"/>
           </a:ln>
         </p:spPr>
+        <p:txBody>
+          <a:bodyPr/>
+          <a:lstStyle/>
+          <a:p>
+            <a:endParaRPr/>
+          </a:p>
+        </p:txBody>
       </p:sp>
       <p:sp>
         <p:nvSpPr>
@@ -3046,6 +2887,13 @@
           </a:solidFill>
           <a:ln/>
         </p:spPr>
+        <p:txBody>
+          <a:bodyPr/>
+          <a:lstStyle/>
+          <a:p>
+            <a:endParaRPr/>
+          </a:p>
+        </p:txBody>
       </p:sp>
       <p:sp>
         <p:nvSpPr>
@@ -3068,7 +2916,7 @@
           <a:bodyPr wrap="square" rtlCol="0" anchor="t"/>
           <a:lstStyle/>
           <a:p>
-            <a:pPr indent="0" marL="0">
+            <a:pPr marL="0" indent="0">
               <a:buNone/>
             </a:pPr>
             <a:r>
@@ -3085,7 +2933,7 @@
             <a:endParaRPr lang="en-US" sz="900" dirty="0"/>
           </a:p>
           <a:p>
-            <a:pPr indent="0" marL="0">
+            <a:pPr marL="0" indent="0">
               <a:buNone/>
             </a:pPr>
             <a:r>
@@ -3102,7 +2950,7 @@
             <a:endParaRPr lang="en-US" sz="900" dirty="0"/>
           </a:p>
           <a:p>
-            <a:pPr indent="0" marL="0">
+            <a:pPr marL="0" indent="0">
               <a:buNone/>
             </a:pPr>
             <a:r>
@@ -3119,7 +2967,7 @@
             <a:endParaRPr lang="en-US" sz="900" dirty="0"/>
           </a:p>
           <a:p>
-            <a:pPr indent="0" marL="0">
+            <a:pPr marL="0" indent="0">
               <a:buNone/>
             </a:pPr>
             <a:r>
@@ -3136,7 +2984,7 @@
             <a:endParaRPr lang="en-US" sz="900" dirty="0"/>
           </a:p>
           <a:p>
-            <a:pPr indent="0" marL="0">
+            <a:pPr marL="0" indent="0">
               <a:buNone/>
             </a:pPr>
             <a:r>
@@ -3153,13 +3001,13 @@
             <a:endParaRPr lang="en-US" sz="900" dirty="0"/>
           </a:p>
           <a:p>
-            <a:pPr indent="0" marL="0">
-              <a:buNone/>
-            </a:pPr>
-            <a:endParaRPr lang="en-US" sz="900" dirty="0"/>
-          </a:p>
-          <a:p>
-            <a:pPr indent="0" marL="0">
+            <a:pPr marL="0" indent="0">
+              <a:buNone/>
+            </a:pPr>
+            <a:endParaRPr lang="en-US" sz="900" dirty="0"/>
+          </a:p>
+          <a:p>
+            <a:pPr marL="0" indent="0">
               <a:buNone/>
             </a:pPr>
             <a:r>
@@ -3176,7 +3024,7 @@
             <a:endParaRPr lang="en-US" sz="900" dirty="0"/>
           </a:p>
           <a:p>
-            <a:pPr indent="0" marL="0">
+            <a:pPr marL="0" indent="0">
               <a:buNone/>
             </a:pPr>
             <a:r>
@@ -3193,7 +3041,7 @@
             <a:endParaRPr lang="en-US" sz="900" dirty="0"/>
           </a:p>
           <a:p>
-            <a:pPr indent="0" marL="0">
+            <a:pPr marL="0" indent="0">
               <a:buNone/>
             </a:pPr>
             <a:r>
@@ -3210,7 +3058,7 @@
             <a:endParaRPr lang="en-US" sz="900" dirty="0"/>
           </a:p>
           <a:p>
-            <a:pPr indent="0" marL="0">
+            <a:pPr marL="0" indent="0">
               <a:buNone/>
             </a:pPr>
             <a:r>
@@ -3227,7 +3075,7 @@
             <a:endParaRPr lang="en-US" sz="900" dirty="0"/>
           </a:p>
           <a:p>
-            <a:pPr indent="0" marL="0">
+            <a:pPr marL="0" indent="0">
               <a:buNone/>
             </a:pPr>
             <a:r>
@@ -3244,7 +3092,7 @@
             <a:endParaRPr lang="en-US" sz="900" dirty="0"/>
           </a:p>
           <a:p>
-            <a:pPr indent="0" marL="0">
+            <a:pPr marL="0" indent="0">
               <a:buNone/>
             </a:pPr>
             <a:r>
@@ -3261,7 +3109,7 @@
             <a:endParaRPr lang="en-US" sz="900" dirty="0"/>
           </a:p>
           <a:p>
-            <a:pPr indent="0" marL="0">
+            <a:pPr marL="0" indent="0">
               <a:buNone/>
             </a:pPr>
             <a:r>
@@ -3300,7 +3148,7 @@
           <a:bodyPr wrap="square" rtlCol="0" anchor="ctr"/>
           <a:lstStyle/>
           <a:p>
-            <a:pPr indent="0" marL="0">
+            <a:pPr marL="0" indent="0">
               <a:buNone/>
             </a:pPr>
             <a:r>
@@ -3339,6 +3187,13 @@
             <a:prstDash val="solid"/>
           </a:ln>
         </p:spPr>
+        <p:txBody>
+          <a:bodyPr/>
+          <a:lstStyle/>
+          <a:p>
+            <a:endParaRPr/>
+          </a:p>
+        </p:txBody>
       </p:sp>
       <p:sp>
         <p:nvSpPr>
@@ -3359,6 +3214,13 @@
           </a:solidFill>
           <a:ln/>
         </p:spPr>
+        <p:txBody>
+          <a:bodyPr/>
+          <a:lstStyle/>
+          <a:p>
+            <a:endParaRPr/>
+          </a:p>
+        </p:txBody>
       </p:sp>
       <p:sp>
         <p:nvSpPr>
@@ -3381,7 +3243,7 @@
           <a:bodyPr wrap="square" rtlCol="0" anchor="t"/>
           <a:lstStyle/>
           <a:p>
-            <a:pPr indent="0" marL="0">
+            <a:pPr marL="0" indent="0">
               <a:buNone/>
             </a:pPr>
             <a:r>
@@ -3398,13 +3260,13 @@
             <a:endParaRPr lang="en-US" sz="900" dirty="0"/>
           </a:p>
           <a:p>
-            <a:pPr indent="0" marL="0">
-              <a:buNone/>
-            </a:pPr>
-            <a:endParaRPr lang="en-US" sz="900" dirty="0"/>
-          </a:p>
-          <a:p>
-            <a:pPr indent="0" marL="0">
+            <a:pPr marL="0" indent="0">
+              <a:buNone/>
+            </a:pPr>
+            <a:endParaRPr lang="en-US" sz="900" dirty="0"/>
+          </a:p>
+          <a:p>
+            <a:pPr marL="0" indent="0">
               <a:buNone/>
             </a:pPr>
             <a:r>
@@ -3421,7 +3283,7 @@
             <a:endParaRPr lang="en-US" sz="900" dirty="0"/>
           </a:p>
           <a:p>
-            <a:pPr indent="0" marL="0">
+            <a:pPr marL="0" indent="0">
               <a:buNone/>
             </a:pPr>
             <a:r>
@@ -3438,13 +3300,13 @@
             <a:endParaRPr lang="en-US" sz="900" dirty="0"/>
           </a:p>
           <a:p>
-            <a:pPr indent="0" marL="0">
-              <a:buNone/>
-            </a:pPr>
-            <a:endParaRPr lang="en-US" sz="900" dirty="0"/>
-          </a:p>
-          <a:p>
-            <a:pPr indent="0" marL="0">
+            <a:pPr marL="0" indent="0">
+              <a:buNone/>
+            </a:pPr>
+            <a:endParaRPr lang="en-US" sz="900" dirty="0"/>
+          </a:p>
+          <a:p>
+            <a:pPr marL="0" indent="0">
               <a:buNone/>
             </a:pPr>
             <a:r>
@@ -3461,13 +3323,13 @@
             <a:endParaRPr lang="en-US" sz="900" dirty="0"/>
           </a:p>
           <a:p>
-            <a:pPr indent="0" marL="0">
-              <a:buNone/>
-            </a:pPr>
-            <a:endParaRPr lang="en-US" sz="900" dirty="0"/>
-          </a:p>
-          <a:p>
-            <a:pPr indent="0" marL="0">
+            <a:pPr marL="0" indent="0">
+              <a:buNone/>
+            </a:pPr>
+            <a:endParaRPr lang="en-US" sz="900" dirty="0"/>
+          </a:p>
+          <a:p>
+            <a:pPr marL="0" indent="0">
               <a:buNone/>
             </a:pPr>
             <a:r>
@@ -3484,7 +3346,7 @@
             <a:endParaRPr lang="en-US" sz="900" dirty="0"/>
           </a:p>
           <a:p>
-            <a:pPr indent="0" marL="0">
+            <a:pPr marL="0" indent="0">
               <a:buNone/>
             </a:pPr>
             <a:r>
@@ -3521,6 +3383,13 @@
           </a:solidFill>
           <a:ln/>
         </p:spPr>
+        <p:txBody>
+          <a:bodyPr/>
+          <a:lstStyle/>
+          <a:p>
+            <a:endParaRPr/>
+          </a:p>
+        </p:txBody>
       </p:sp>
       <p:sp>
         <p:nvSpPr>
@@ -3543,7 +3412,7 @@
           <a:bodyPr wrap="square" rtlCol="0" anchor="ctr"/>
           <a:lstStyle/>
           <a:p>
-            <a:pPr indent="0" marL="0">
+            <a:pPr marL="0" indent="0">
               <a:buNone/>
             </a:pPr>
             <a:r>
@@ -3574,6 +3443,7 @@
         <a:solidFill>
           <a:srgbClr val="0D1117"/>
         </a:solidFill>
+        <a:effectLst/>
       </p:bgPr>
     </p:bg>
     <p:spTree>
@@ -3611,7 +3481,7 @@
           <a:bodyPr wrap="square" rtlCol="0" anchor="ctr"/>
           <a:lstStyle/>
           <a:p>
-            <a:pPr indent="0" marL="0">
+            <a:pPr marL="0" indent="0">
               <a:buNone/>
             </a:pPr>
             <a:r>
@@ -3650,7 +3520,7 @@
           <a:bodyPr wrap="square" rtlCol="0" anchor="ctr"/>
           <a:lstStyle/>
           <a:p>
-            <a:pPr indent="0" marL="0">
+            <a:pPr marL="0" indent="0">
               <a:buNone/>
             </a:pPr>
             <a:r>
@@ -3689,6 +3559,13 @@
             <a:prstDash val="solid"/>
           </a:ln>
         </p:spPr>
+        <p:txBody>
+          <a:bodyPr/>
+          <a:lstStyle/>
+          <a:p>
+            <a:endParaRPr/>
+          </a:p>
+        </p:txBody>
       </p:sp>
       <p:sp>
         <p:nvSpPr>
@@ -3709,6 +3586,13 @@
           </a:solidFill>
           <a:ln/>
         </p:spPr>
+        <p:txBody>
+          <a:bodyPr/>
+          <a:lstStyle/>
+          <a:p>
+            <a:endParaRPr/>
+          </a:p>
+        </p:txBody>
       </p:sp>
       <p:sp>
         <p:nvSpPr>
@@ -3731,7 +3615,7 @@
           <a:bodyPr wrap="square" rtlCol="0" anchor="t"/>
           <a:lstStyle/>
           <a:p>
-            <a:pPr indent="0" marL="0">
+            <a:pPr marL="0" indent="0">
               <a:buNone/>
             </a:pPr>
             <a:r>
@@ -3748,7 +3632,7 @@
             <a:endParaRPr lang="en-US" sz="900" dirty="0"/>
           </a:p>
           <a:p>
-            <a:pPr indent="0" marL="0">
+            <a:pPr marL="0" indent="0">
               <a:buNone/>
             </a:pPr>
             <a:r>
@@ -3765,7 +3649,7 @@
             <a:endParaRPr lang="en-US" sz="900" dirty="0"/>
           </a:p>
           <a:p>
-            <a:pPr indent="0" marL="0">
+            <a:pPr marL="0" indent="0">
               <a:buNone/>
             </a:pPr>
             <a:r>
@@ -3782,13 +3666,13 @@
             <a:endParaRPr lang="en-US" sz="900" dirty="0"/>
           </a:p>
           <a:p>
-            <a:pPr indent="0" marL="0">
-              <a:buNone/>
-            </a:pPr>
-            <a:endParaRPr lang="en-US" sz="900" dirty="0"/>
-          </a:p>
-          <a:p>
-            <a:pPr indent="0" marL="0">
+            <a:pPr marL="0" indent="0">
+              <a:buNone/>
+            </a:pPr>
+            <a:endParaRPr lang="en-US" sz="900" dirty="0"/>
+          </a:p>
+          <a:p>
+            <a:pPr marL="0" indent="0">
               <a:buNone/>
             </a:pPr>
             <a:r>
@@ -3805,7 +3689,7 @@
             <a:endParaRPr lang="en-US" sz="900" dirty="0"/>
           </a:p>
           <a:p>
-            <a:pPr indent="0" marL="0">
+            <a:pPr marL="0" indent="0">
               <a:buNone/>
             </a:pPr>
             <a:r>
@@ -3822,7 +3706,7 @@
             <a:endParaRPr lang="en-US" sz="900" dirty="0"/>
           </a:p>
           <a:p>
-            <a:pPr indent="0" marL="0">
+            <a:pPr marL="0" indent="0">
               <a:buNone/>
             </a:pPr>
             <a:r>
@@ -3839,7 +3723,7 @@
             <a:endParaRPr lang="en-US" sz="900" dirty="0"/>
           </a:p>
           <a:p>
-            <a:pPr indent="0" marL="0">
+            <a:pPr marL="0" indent="0">
               <a:buNone/>
             </a:pPr>
             <a:r>
@@ -3856,7 +3740,7 @@
             <a:endParaRPr lang="en-US" sz="900" dirty="0"/>
           </a:p>
           <a:p>
-            <a:pPr indent="0" marL="0">
+            <a:pPr marL="0" indent="0">
               <a:buNone/>
             </a:pPr>
             <a:r>
@@ -3873,7 +3757,7 @@
             <a:endParaRPr lang="en-US" sz="900" dirty="0"/>
           </a:p>
           <a:p>
-            <a:pPr indent="0" marL="0">
+            <a:pPr marL="0" indent="0">
               <a:buNone/>
             </a:pPr>
             <a:r>
@@ -3890,7 +3774,7 @@
             <a:endParaRPr lang="en-US" sz="900" dirty="0"/>
           </a:p>
           <a:p>
-            <a:pPr indent="0" marL="0">
+            <a:pPr marL="0" indent="0">
               <a:buNone/>
             </a:pPr>
             <a:r>
@@ -3907,7 +3791,7 @@
             <a:endParaRPr lang="en-US" sz="900" dirty="0"/>
           </a:p>
           <a:p>
-            <a:pPr indent="0" marL="0">
+            <a:pPr marL="0" indent="0">
               <a:buNone/>
             </a:pPr>
             <a:r>
@@ -3924,7 +3808,7 @@
             <a:endParaRPr lang="en-US" sz="900" dirty="0"/>
           </a:p>
           <a:p>
-            <a:pPr indent="0" marL="0">
+            <a:pPr marL="0" indent="0">
               <a:buNone/>
             </a:pPr>
             <a:r>
@@ -3941,7 +3825,7 @@
             <a:endParaRPr lang="en-US" sz="900" dirty="0"/>
           </a:p>
           <a:p>
-            <a:pPr indent="0" marL="0">
+            <a:pPr marL="0" indent="0">
               <a:buNone/>
             </a:pPr>
             <a:r>
@@ -3958,7 +3842,7 @@
             <a:endParaRPr lang="en-US" sz="900" dirty="0"/>
           </a:p>
           <a:p>
-            <a:pPr indent="0" marL="0">
+            <a:pPr marL="0" indent="0">
               <a:buNone/>
             </a:pPr>
             <a:r>
@@ -3975,7 +3859,7 @@
             <a:endParaRPr lang="en-US" sz="900" dirty="0"/>
           </a:p>
           <a:p>
-            <a:pPr indent="0" marL="0">
+            <a:pPr marL="0" indent="0">
               <a:buNone/>
             </a:pPr>
             <a:r>
@@ -4014,7 +3898,7 @@
           <a:bodyPr wrap="square" rtlCol="0" anchor="ctr"/>
           <a:lstStyle/>
           <a:p>
-            <a:pPr indent="0" marL="0">
+            <a:pPr marL="0" indent="0">
               <a:buNone/>
             </a:pPr>
             <a:r>
@@ -4053,6 +3937,13 @@
             <a:prstDash val="solid"/>
           </a:ln>
         </p:spPr>
+        <p:txBody>
+          <a:bodyPr/>
+          <a:lstStyle/>
+          <a:p>
+            <a:endParaRPr/>
+          </a:p>
+        </p:txBody>
       </p:sp>
       <p:sp>
         <p:nvSpPr>
@@ -4073,6 +3964,13 @@
           </a:solidFill>
           <a:ln/>
         </p:spPr>
+        <p:txBody>
+          <a:bodyPr/>
+          <a:lstStyle/>
+          <a:p>
+            <a:endParaRPr/>
+          </a:p>
+        </p:txBody>
       </p:sp>
       <p:sp>
         <p:nvSpPr>
@@ -4095,7 +3993,7 @@
           <a:bodyPr wrap="square" rtlCol="0" anchor="t"/>
           <a:lstStyle/>
           <a:p>
-            <a:pPr indent="0" marL="0">
+            <a:pPr marL="0" indent="0">
               <a:buNone/>
             </a:pPr>
             <a:r>
@@ -4112,13 +4010,13 @@
             <a:endParaRPr lang="en-US" sz="900" dirty="0"/>
           </a:p>
           <a:p>
-            <a:pPr indent="0" marL="0">
-              <a:buNone/>
-            </a:pPr>
-            <a:endParaRPr lang="en-US" sz="900" dirty="0"/>
-          </a:p>
-          <a:p>
-            <a:pPr indent="0" marL="0">
+            <a:pPr marL="0" indent="0">
+              <a:buNone/>
+            </a:pPr>
+            <a:endParaRPr lang="en-US" sz="900" dirty="0"/>
+          </a:p>
+          <a:p>
+            <a:pPr marL="0" indent="0">
               <a:buNone/>
             </a:pPr>
             <a:r>
@@ -4135,7 +4033,7 @@
             <a:endParaRPr lang="en-US" sz="900" dirty="0"/>
           </a:p>
           <a:p>
-            <a:pPr indent="0" marL="0">
+            <a:pPr marL="0" indent="0">
               <a:buNone/>
             </a:pPr>
             <a:r>
@@ -4152,13 +4050,13 @@
             <a:endParaRPr lang="en-US" sz="900" dirty="0"/>
           </a:p>
           <a:p>
-            <a:pPr indent="0" marL="0">
-              <a:buNone/>
-            </a:pPr>
-            <a:endParaRPr lang="en-US" sz="900" dirty="0"/>
-          </a:p>
-          <a:p>
-            <a:pPr indent="0" marL="0">
+            <a:pPr marL="0" indent="0">
+              <a:buNone/>
+            </a:pPr>
+            <a:endParaRPr lang="en-US" sz="900" dirty="0"/>
+          </a:p>
+          <a:p>
+            <a:pPr marL="0" indent="0">
               <a:buNone/>
             </a:pPr>
             <a:r>
@@ -4175,7 +4073,7 @@
             <a:endParaRPr lang="en-US" sz="900" dirty="0"/>
           </a:p>
           <a:p>
-            <a:pPr indent="0" marL="0">
+            <a:pPr marL="0" indent="0">
               <a:buNone/>
             </a:pPr>
             <a:r>
@@ -4192,7 +4090,7 @@
             <a:endParaRPr lang="en-US" sz="900" dirty="0"/>
           </a:p>
           <a:p>
-            <a:pPr indent="0" marL="0">
+            <a:pPr marL="0" indent="0">
               <a:buNone/>
             </a:pPr>
             <a:r>
@@ -4209,13 +4107,13 @@
             <a:endParaRPr lang="en-US" sz="900" dirty="0"/>
           </a:p>
           <a:p>
-            <a:pPr indent="0" marL="0">
-              <a:buNone/>
-            </a:pPr>
-            <a:endParaRPr lang="en-US" sz="900" dirty="0"/>
-          </a:p>
-          <a:p>
-            <a:pPr indent="0" marL="0">
+            <a:pPr marL="0" indent="0">
+              <a:buNone/>
+            </a:pPr>
+            <a:endParaRPr lang="en-US" sz="900" dirty="0"/>
+          </a:p>
+          <a:p>
+            <a:pPr marL="0" indent="0">
               <a:buNone/>
             </a:pPr>
             <a:r>
@@ -4232,7 +4130,7 @@
             <a:endParaRPr lang="en-US" sz="900" dirty="0"/>
           </a:p>
           <a:p>
-            <a:pPr indent="0" marL="0">
+            <a:pPr marL="0" indent="0">
               <a:buNone/>
             </a:pPr>
             <a:r>
@@ -4269,6 +4167,13 @@
           </a:solidFill>
           <a:ln/>
         </p:spPr>
+        <p:txBody>
+          <a:bodyPr/>
+          <a:lstStyle/>
+          <a:p>
+            <a:endParaRPr/>
+          </a:p>
+        </p:txBody>
       </p:sp>
       <p:sp>
         <p:nvSpPr>
@@ -4291,7 +4196,7 @@
           <a:bodyPr wrap="square" rtlCol="0" anchor="ctr"/>
           <a:lstStyle/>
           <a:p>
-            <a:pPr indent="0" marL="0">
+            <a:pPr marL="0" indent="0">
               <a:buNone/>
             </a:pPr>
             <a:r>
@@ -4322,6 +4227,7 @@
         <a:solidFill>
           <a:srgbClr val="0D1117"/>
         </a:solidFill>
+        <a:effectLst/>
       </p:bgPr>
     </p:bg>
     <p:spTree>
@@ -4359,7 +4265,7 @@
           <a:bodyPr wrap="square" rtlCol="0" anchor="ctr"/>
           <a:lstStyle/>
           <a:p>
-            <a:pPr indent="0" marL="0">
+            <a:pPr marL="0" indent="0">
               <a:buNone/>
             </a:pPr>
             <a:r>
@@ -4398,7 +4304,7 @@
           <a:bodyPr wrap="square" rtlCol="0" anchor="ctr"/>
           <a:lstStyle/>
           <a:p>
-            <a:pPr algn="ctr" indent="0" marL="0">
+            <a:pPr marL="0" indent="0" algn="ctr">
               <a:buNone/>
             </a:pPr>
             <a:r>
@@ -4434,7 +4340,7 @@
           <a:bodyPr wrap="square" rtlCol="0" anchor="ctr"/>
           <a:lstStyle/>
           <a:p>
-            <a:pPr algn="ctr" indent="0" marL="0">
+            <a:pPr marL="0" indent="0" algn="ctr">
               <a:buNone/>
             </a:pPr>
             <a:r>
@@ -4468,6 +4374,13 @@
           </a:solidFill>
           <a:ln/>
         </p:spPr>
+        <p:txBody>
+          <a:bodyPr/>
+          <a:lstStyle/>
+          <a:p>
+            <a:endParaRPr/>
+          </a:p>
+        </p:txBody>
       </p:sp>
       <p:sp>
         <p:nvSpPr>
@@ -4490,7 +4403,7 @@
           <a:bodyPr wrap="square" rtlCol="0" anchor="ctr"/>
           <a:lstStyle/>
           <a:p>
-            <a:pPr indent="0" marL="0">
+            <a:pPr marL="0" indent="0">
               <a:buNone/>
             </a:pPr>
             <a:r>
@@ -4524,6 +4437,13 @@
           </a:solidFill>
           <a:ln/>
         </p:spPr>
+        <p:txBody>
+          <a:bodyPr/>
+          <a:lstStyle/>
+          <a:p>
+            <a:endParaRPr/>
+          </a:p>
+        </p:txBody>
       </p:sp>
       <p:sp>
         <p:nvSpPr>
@@ -4546,7 +4466,7 @@
           <a:bodyPr wrap="square" rtlCol="0" anchor="ctr"/>
           <a:lstStyle/>
           <a:p>
-            <a:pPr algn="ctr" indent="0" marL="0">
+            <a:pPr marL="0" indent="0" algn="ctr">
               <a:buNone/>
             </a:pPr>
             <a:r>
@@ -4580,6 +4500,13 @@
           </a:solidFill>
           <a:ln/>
         </p:spPr>
+        <p:txBody>
+          <a:bodyPr/>
+          <a:lstStyle/>
+          <a:p>
+            <a:endParaRPr/>
+          </a:p>
+        </p:txBody>
       </p:sp>
       <p:sp>
         <p:nvSpPr>
@@ -4602,7 +4529,7 @@
           <a:bodyPr wrap="square" rtlCol="0" anchor="ctr"/>
           <a:lstStyle/>
           <a:p>
-            <a:pPr algn="ctr" indent="0" marL="0">
+            <a:pPr marL="0" indent="0" algn="ctr">
               <a:buNone/>
             </a:pPr>
             <a:r>
@@ -4636,6 +4563,13 @@
           </a:solidFill>
           <a:ln/>
         </p:spPr>
+        <p:txBody>
+          <a:bodyPr/>
+          <a:lstStyle/>
+          <a:p>
+            <a:endParaRPr/>
+          </a:p>
+        </p:txBody>
       </p:sp>
       <p:sp>
         <p:nvSpPr>
@@ -4658,7 +4592,7 @@
           <a:bodyPr wrap="square" rtlCol="0" anchor="ctr"/>
           <a:lstStyle/>
           <a:p>
-            <a:pPr indent="0" marL="0">
+            <a:pPr marL="0" indent="0">
               <a:buNone/>
             </a:pPr>
             <a:r>
@@ -4692,6 +4626,13 @@
           </a:solidFill>
           <a:ln/>
         </p:spPr>
+        <p:txBody>
+          <a:bodyPr/>
+          <a:lstStyle/>
+          <a:p>
+            <a:endParaRPr/>
+          </a:p>
+        </p:txBody>
       </p:sp>
       <p:sp>
         <p:nvSpPr>
@@ -4714,7 +4655,7 @@
           <a:bodyPr wrap="square" rtlCol="0" anchor="ctr"/>
           <a:lstStyle/>
           <a:p>
-            <a:pPr algn="ctr" indent="0" marL="0">
+            <a:pPr marL="0" indent="0" algn="ctr">
               <a:buNone/>
             </a:pPr>
             <a:r>
@@ -4748,6 +4689,13 @@
           </a:solidFill>
           <a:ln/>
         </p:spPr>
+        <p:txBody>
+          <a:bodyPr/>
+          <a:lstStyle/>
+          <a:p>
+            <a:endParaRPr/>
+          </a:p>
+        </p:txBody>
       </p:sp>
       <p:sp>
         <p:nvSpPr>
@@ -4770,7 +4718,7 @@
           <a:bodyPr wrap="square" rtlCol="0" anchor="ctr"/>
           <a:lstStyle/>
           <a:p>
-            <a:pPr algn="ctr" indent="0" marL="0">
+            <a:pPr marL="0" indent="0" algn="ctr">
               <a:buNone/>
             </a:pPr>
             <a:r>
@@ -4804,6 +4752,13 @@
           </a:solidFill>
           <a:ln/>
         </p:spPr>
+        <p:txBody>
+          <a:bodyPr/>
+          <a:lstStyle/>
+          <a:p>
+            <a:endParaRPr/>
+          </a:p>
+        </p:txBody>
       </p:sp>
       <p:sp>
         <p:nvSpPr>
@@ -4826,7 +4781,7 @@
           <a:bodyPr wrap="square" rtlCol="0" anchor="ctr"/>
           <a:lstStyle/>
           <a:p>
-            <a:pPr indent="0" marL="0">
+            <a:pPr marL="0" indent="0">
               <a:buNone/>
             </a:pPr>
             <a:r>
@@ -4860,6 +4815,13 @@
           </a:solidFill>
           <a:ln/>
         </p:spPr>
+        <p:txBody>
+          <a:bodyPr/>
+          <a:lstStyle/>
+          <a:p>
+            <a:endParaRPr/>
+          </a:p>
+        </p:txBody>
       </p:sp>
       <p:sp>
         <p:nvSpPr>
@@ -4882,7 +4844,7 @@
           <a:bodyPr wrap="square" rtlCol="0" anchor="ctr"/>
           <a:lstStyle/>
           <a:p>
-            <a:pPr algn="ctr" indent="0" marL="0">
+            <a:pPr marL="0" indent="0" algn="ctr">
               <a:buNone/>
             </a:pPr>
             <a:r>
@@ -4916,6 +4878,13 @@
           </a:solidFill>
           <a:ln/>
         </p:spPr>
+        <p:txBody>
+          <a:bodyPr/>
+          <a:lstStyle/>
+          <a:p>
+            <a:endParaRPr/>
+          </a:p>
+        </p:txBody>
       </p:sp>
       <p:sp>
         <p:nvSpPr>
@@ -4938,7 +4907,7 @@
           <a:bodyPr wrap="square" rtlCol="0" anchor="ctr"/>
           <a:lstStyle/>
           <a:p>
-            <a:pPr algn="ctr" indent="0" marL="0">
+            <a:pPr marL="0" indent="0" algn="ctr">
               <a:buNone/>
             </a:pPr>
             <a:r>
@@ -4972,6 +4941,13 @@
           </a:solidFill>
           <a:ln/>
         </p:spPr>
+        <p:txBody>
+          <a:bodyPr/>
+          <a:lstStyle/>
+          <a:p>
+            <a:endParaRPr/>
+          </a:p>
+        </p:txBody>
       </p:sp>
       <p:sp>
         <p:nvSpPr>
@@ -4994,7 +4970,7 @@
           <a:bodyPr wrap="square" rtlCol="0" anchor="ctr"/>
           <a:lstStyle/>
           <a:p>
-            <a:pPr indent="0" marL="0">
+            <a:pPr marL="0" indent="0">
               <a:buNone/>
             </a:pPr>
             <a:r>
@@ -5028,6 +5004,13 @@
           </a:solidFill>
           <a:ln/>
         </p:spPr>
+        <p:txBody>
+          <a:bodyPr/>
+          <a:lstStyle/>
+          <a:p>
+            <a:endParaRPr/>
+          </a:p>
+        </p:txBody>
       </p:sp>
       <p:sp>
         <p:nvSpPr>
@@ -5050,7 +5033,7 @@
           <a:bodyPr wrap="square" rtlCol="0" anchor="ctr"/>
           <a:lstStyle/>
           <a:p>
-            <a:pPr algn="ctr" indent="0" marL="0">
+            <a:pPr marL="0" indent="0" algn="ctr">
               <a:buNone/>
             </a:pPr>
             <a:r>
@@ -5084,6 +5067,13 @@
           </a:solidFill>
           <a:ln/>
         </p:spPr>
+        <p:txBody>
+          <a:bodyPr/>
+          <a:lstStyle/>
+          <a:p>
+            <a:endParaRPr/>
+          </a:p>
+        </p:txBody>
       </p:sp>
       <p:sp>
         <p:nvSpPr>
@@ -5106,7 +5096,7 @@
           <a:bodyPr wrap="square" rtlCol="0" anchor="ctr"/>
           <a:lstStyle/>
           <a:p>
-            <a:pPr algn="ctr" indent="0" marL="0">
+            <a:pPr marL="0" indent="0" algn="ctr">
               <a:buNone/>
             </a:pPr>
             <a:r>
@@ -5140,6 +5130,13 @@
           </a:solidFill>
           <a:ln/>
         </p:spPr>
+        <p:txBody>
+          <a:bodyPr/>
+          <a:lstStyle/>
+          <a:p>
+            <a:endParaRPr/>
+          </a:p>
+        </p:txBody>
       </p:sp>
       <p:sp>
         <p:nvSpPr>
@@ -5162,7 +5159,7 @@
           <a:bodyPr wrap="square" rtlCol="0" anchor="ctr"/>
           <a:lstStyle/>
           <a:p>
-            <a:pPr indent="0" marL="0">
+            <a:pPr marL="0" indent="0">
               <a:buNone/>
             </a:pPr>
             <a:r>
@@ -5196,6 +5193,13 @@
           </a:solidFill>
           <a:ln/>
         </p:spPr>
+        <p:txBody>
+          <a:bodyPr/>
+          <a:lstStyle/>
+          <a:p>
+            <a:endParaRPr/>
+          </a:p>
+        </p:txBody>
       </p:sp>
       <p:sp>
         <p:nvSpPr>
@@ -5218,7 +5222,7 @@
           <a:bodyPr wrap="square" rtlCol="0" anchor="ctr"/>
           <a:lstStyle/>
           <a:p>
-            <a:pPr algn="ctr" indent="0" marL="0">
+            <a:pPr marL="0" indent="0" algn="ctr">
               <a:buNone/>
             </a:pPr>
             <a:r>
@@ -5252,6 +5256,13 @@
           </a:solidFill>
           <a:ln/>
         </p:spPr>
+        <p:txBody>
+          <a:bodyPr/>
+          <a:lstStyle/>
+          <a:p>
+            <a:endParaRPr/>
+          </a:p>
+        </p:txBody>
       </p:sp>
       <p:sp>
         <p:nvSpPr>
@@ -5274,7 +5285,7 @@
           <a:bodyPr wrap="square" rtlCol="0" anchor="ctr"/>
           <a:lstStyle/>
           <a:p>
-            <a:pPr algn="ctr" indent="0" marL="0">
+            <a:pPr marL="0" indent="0" algn="ctr">
               <a:buNone/>
             </a:pPr>
             <a:r>
@@ -5308,6 +5319,13 @@
           </a:solidFill>
           <a:ln/>
         </p:spPr>
+        <p:txBody>
+          <a:bodyPr/>
+          <a:lstStyle/>
+          <a:p>
+            <a:endParaRPr/>
+          </a:p>
+        </p:txBody>
       </p:sp>
       <p:sp>
         <p:nvSpPr>
@@ -5330,7 +5348,7 @@
           <a:bodyPr wrap="square" rtlCol="0" anchor="ctr"/>
           <a:lstStyle/>
           <a:p>
-            <a:pPr indent="0" marL="0">
+            <a:pPr marL="0" indent="0">
               <a:buNone/>
             </a:pPr>
             <a:r>
@@ -5364,6 +5382,13 @@
           </a:solidFill>
           <a:ln/>
         </p:spPr>
+        <p:txBody>
+          <a:bodyPr/>
+          <a:lstStyle/>
+          <a:p>
+            <a:endParaRPr/>
+          </a:p>
+        </p:txBody>
       </p:sp>
       <p:sp>
         <p:nvSpPr>
@@ -5386,7 +5411,7 @@
           <a:bodyPr wrap="square" rtlCol="0" anchor="ctr"/>
           <a:lstStyle/>
           <a:p>
-            <a:pPr algn="ctr" indent="0" marL="0">
+            <a:pPr marL="0" indent="0" algn="ctr">
               <a:buNone/>
             </a:pPr>
             <a:r>
@@ -5420,6 +5445,13 @@
           </a:solidFill>
           <a:ln/>
         </p:spPr>
+        <p:txBody>
+          <a:bodyPr/>
+          <a:lstStyle/>
+          <a:p>
+            <a:endParaRPr/>
+          </a:p>
+        </p:txBody>
       </p:sp>
       <p:sp>
         <p:nvSpPr>
@@ -5442,7 +5474,7 @@
           <a:bodyPr wrap="square" rtlCol="0" anchor="ctr"/>
           <a:lstStyle/>
           <a:p>
-            <a:pPr algn="ctr" indent="0" marL="0">
+            <a:pPr marL="0" indent="0" algn="ctr">
               <a:buNone/>
             </a:pPr>
             <a:r>
@@ -5476,6 +5508,13 @@
           </a:solidFill>
           <a:ln/>
         </p:spPr>
+        <p:txBody>
+          <a:bodyPr/>
+          <a:lstStyle/>
+          <a:p>
+            <a:endParaRPr/>
+          </a:p>
+        </p:txBody>
       </p:sp>
       <p:sp>
         <p:nvSpPr>
@@ -5498,7 +5537,7 @@
           <a:bodyPr wrap="square" rtlCol="0" anchor="ctr"/>
           <a:lstStyle/>
           <a:p>
-            <a:pPr indent="0" marL="0">
+            <a:pPr marL="0" indent="0">
               <a:buNone/>
             </a:pPr>
             <a:r>
@@ -5512,7 +5551,7 @@
             <a:endParaRPr lang="en-US" sz="1000" dirty="0"/>
           </a:p>
           <a:p>
-            <a:pPr indent="0" marL="0">
+            <a:pPr marL="0" indent="0">
               <a:buNone/>
             </a:pPr>
             <a:r>
@@ -5543,6 +5582,7 @@
         <a:solidFill>
           <a:srgbClr val="0D1117"/>
         </a:solidFill>
+        <a:effectLst/>
       </p:bgPr>
     </p:bg>
     <p:spTree>
@@ -5580,7 +5620,7 @@
           <a:bodyPr wrap="square" rtlCol="0" anchor="ctr"/>
           <a:lstStyle/>
           <a:p>
-            <a:pPr indent="0" marL="0">
+            <a:pPr marL="0" indent="0">
               <a:buNone/>
             </a:pPr>
             <a:r>
@@ -5617,6 +5657,13 @@
           </a:solidFill>
           <a:ln/>
         </p:spPr>
+        <p:txBody>
+          <a:bodyPr/>
+          <a:lstStyle/>
+          <a:p>
+            <a:endParaRPr/>
+          </a:p>
+        </p:txBody>
       </p:sp>
       <p:sp>
         <p:nvSpPr>
@@ -5637,6 +5684,13 @@
           </a:solidFill>
           <a:ln/>
         </p:spPr>
+        <p:txBody>
+          <a:bodyPr/>
+          <a:lstStyle/>
+          <a:p>
+            <a:endParaRPr/>
+          </a:p>
+        </p:txBody>
       </p:sp>
       <p:sp>
         <p:nvSpPr>
@@ -5659,7 +5713,7 @@
           <a:bodyPr wrap="square" rtlCol="0" anchor="ctr"/>
           <a:lstStyle/>
           <a:p>
-            <a:pPr indent="0" marL="0">
+            <a:pPr marL="0" indent="0">
               <a:buNone/>
             </a:pPr>
             <a:r>
@@ -5695,7 +5749,7 @@
           <a:bodyPr wrap="square" rtlCol="0" anchor="ctr"/>
           <a:lstStyle/>
           <a:p>
-            <a:pPr indent="0" marL="0">
+            <a:pPr marL="0" indent="0">
               <a:buNone/>
             </a:pPr>
             <a:r>
@@ -5729,6 +5783,13 @@
           </a:solidFill>
           <a:ln/>
         </p:spPr>
+        <p:txBody>
+          <a:bodyPr/>
+          <a:lstStyle/>
+          <a:p>
+            <a:endParaRPr/>
+          </a:p>
+        </p:txBody>
       </p:sp>
       <p:sp>
         <p:nvSpPr>
@@ -5749,6 +5810,13 @@
           </a:solidFill>
           <a:ln/>
         </p:spPr>
+        <p:txBody>
+          <a:bodyPr/>
+          <a:lstStyle/>
+          <a:p>
+            <a:endParaRPr/>
+          </a:p>
+        </p:txBody>
       </p:sp>
       <p:sp>
         <p:nvSpPr>
@@ -5771,7 +5839,7 @@
           <a:bodyPr wrap="square" rtlCol="0" anchor="ctr"/>
           <a:lstStyle/>
           <a:p>
-            <a:pPr indent="0" marL="0">
+            <a:pPr marL="0" indent="0">
               <a:buNone/>
             </a:pPr>
             <a:r>
@@ -5807,7 +5875,7 @@
           <a:bodyPr wrap="square" rtlCol="0" anchor="ctr"/>
           <a:lstStyle/>
           <a:p>
-            <a:pPr indent="0" marL="0">
+            <a:pPr marL="0" indent="0">
               <a:buNone/>
             </a:pPr>
             <a:r>
@@ -5841,6 +5909,13 @@
           </a:solidFill>
           <a:ln/>
         </p:spPr>
+        <p:txBody>
+          <a:bodyPr/>
+          <a:lstStyle/>
+          <a:p>
+            <a:endParaRPr/>
+          </a:p>
+        </p:txBody>
       </p:sp>
       <p:sp>
         <p:nvSpPr>
@@ -5861,6 +5936,13 @@
           </a:solidFill>
           <a:ln/>
         </p:spPr>
+        <p:txBody>
+          <a:bodyPr/>
+          <a:lstStyle/>
+          <a:p>
+            <a:endParaRPr/>
+          </a:p>
+        </p:txBody>
       </p:sp>
       <p:sp>
         <p:nvSpPr>
@@ -5883,7 +5965,7 @@
           <a:bodyPr wrap="square" rtlCol="0" anchor="ctr"/>
           <a:lstStyle/>
           <a:p>
-            <a:pPr indent="0" marL="0">
+            <a:pPr marL="0" indent="0">
               <a:buNone/>
             </a:pPr>
             <a:r>
@@ -5919,7 +6001,7 @@
           <a:bodyPr wrap="square" rtlCol="0" anchor="ctr"/>
           <a:lstStyle/>
           <a:p>
-            <a:pPr indent="0" marL="0">
+            <a:pPr marL="0" indent="0">
               <a:buNone/>
             </a:pPr>
             <a:r>
@@ -5953,6 +6035,13 @@
           </a:solidFill>
           <a:ln/>
         </p:spPr>
+        <p:txBody>
+          <a:bodyPr/>
+          <a:lstStyle/>
+          <a:p>
+            <a:endParaRPr/>
+          </a:p>
+        </p:txBody>
       </p:sp>
       <p:sp>
         <p:nvSpPr>
@@ -5973,6 +6062,13 @@
           </a:solidFill>
           <a:ln/>
         </p:spPr>
+        <p:txBody>
+          <a:bodyPr/>
+          <a:lstStyle/>
+          <a:p>
+            <a:endParaRPr/>
+          </a:p>
+        </p:txBody>
       </p:sp>
       <p:sp>
         <p:nvSpPr>
@@ -5995,7 +6091,7 @@
           <a:bodyPr wrap="square" rtlCol="0" anchor="ctr"/>
           <a:lstStyle/>
           <a:p>
-            <a:pPr indent="0" marL="0">
+            <a:pPr marL="0" indent="0">
               <a:buNone/>
             </a:pPr>
             <a:r>
@@ -6031,18 +6127,14 @@
           <a:bodyPr wrap="square" rtlCol="0" anchor="ctr"/>
           <a:lstStyle/>
           <a:p>
-            <a:pPr indent="0" marL="0">
-              <a:buNone/>
-            </a:pPr>
-            <a:r>
-              <a:rPr lang="en-US" sz="1000" dirty="0">
-                <a:solidFill>
-                  <a:srgbClr val="E6EDF3"/>
-                </a:solidFill>
-              </a:rPr>
-              <a:t>Move semantics enforce linear usage—can't use after transition</a:t>
-            </a:r>
-            <a:endParaRPr lang="en-US" sz="1000" dirty="0"/>
+            <a:r>
+              <a:rPr sz="1100" dirty="0">
+                <a:solidFill>
+                  <a:schemeClr val="bg2"/>
+                </a:solidFill>
+              </a:rPr>
+              <a:t>Move semantics encourage consume/produce; moved-from use is still possible (logic error)</a:t>
+            </a:r>
           </a:p>
         </p:txBody>
       </p:sp>
@@ -6065,6 +6157,13 @@
           </a:solidFill>
           <a:ln/>
         </p:spPr>
+        <p:txBody>
+          <a:bodyPr/>
+          <a:lstStyle/>
+          <a:p>
+            <a:endParaRPr/>
+          </a:p>
+        </p:txBody>
       </p:sp>
       <p:sp>
         <p:nvSpPr>
@@ -6085,6 +6184,13 @@
           </a:solidFill>
           <a:ln/>
         </p:spPr>
+        <p:txBody>
+          <a:bodyPr/>
+          <a:lstStyle/>
+          <a:p>
+            <a:endParaRPr/>
+          </a:p>
+        </p:txBody>
       </p:sp>
       <p:sp>
         <p:nvSpPr>
@@ -6107,7 +6213,7 @@
           <a:bodyPr wrap="square" rtlCol="0" anchor="ctr"/>
           <a:lstStyle/>
           <a:p>
-            <a:pPr indent="0" marL="0">
+            <a:pPr marL="0" indent="0">
               <a:buNone/>
             </a:pPr>
             <a:r>
@@ -6143,7 +6249,7 @@
           <a:bodyPr wrap="square" rtlCol="0" anchor="ctr"/>
           <a:lstStyle/>
           <a:p>
-            <a:pPr indent="0" marL="0">
+            <a:pPr marL="0" indent="0">
               <a:buNone/>
             </a:pPr>
             <a:r>
@@ -6177,6 +6283,13 @@
           </a:solidFill>
           <a:ln/>
         </p:spPr>
+        <p:txBody>
+          <a:bodyPr/>
+          <a:lstStyle/>
+          <a:p>
+            <a:endParaRPr/>
+          </a:p>
+        </p:txBody>
       </p:sp>
       <p:sp>
         <p:nvSpPr>
@@ -6197,6 +6310,13 @@
           </a:solidFill>
           <a:ln/>
         </p:spPr>
+        <p:txBody>
+          <a:bodyPr/>
+          <a:lstStyle/>
+          <a:p>
+            <a:endParaRPr/>
+          </a:p>
+        </p:txBody>
       </p:sp>
       <p:sp>
         <p:nvSpPr>
@@ -6219,7 +6339,7 @@
           <a:bodyPr wrap="square" rtlCol="0" anchor="ctr"/>
           <a:lstStyle/>
           <a:p>
-            <a:pPr indent="0" marL="0">
+            <a:pPr marL="0" indent="0">
               <a:buNone/>
             </a:pPr>
             <a:r>
@@ -6255,18 +6375,14 @@
           <a:bodyPr wrap="square" rtlCol="0" anchor="ctr"/>
           <a:lstStyle/>
           <a:p>
-            <a:pPr indent="0" marL="0">
-              <a:buNone/>
-            </a:pPr>
-            <a:r>
-              <a:rPr lang="en-US" sz="1000" dirty="0">
-                <a:solidFill>
-                  <a:srgbClr val="E6EDF3"/>
-                </a:solidFill>
-              </a:rPr>
-              <a:t>Zero runtime cost—types are compile-time only</a:t>
-            </a:r>
-            <a:endParaRPr lang="en-US" sz="1000" dirty="0"/>
+            <a:r>
+              <a:rPr sz="1100" dirty="0">
+                <a:solidFill>
+                  <a:schemeClr val="bg2"/>
+                </a:solidFill>
+              </a:rPr>
+              <a:t>No explicit runtime state flag (design-dependent)</a:t>
+            </a:r>
           </a:p>
         </p:txBody>
       </p:sp>
@@ -6291,7 +6407,7 @@
           <a:bodyPr wrap="square" rtlCol="0" anchor="ctr"/>
           <a:lstStyle/>
           <a:p>
-            <a:pPr algn="ctr" indent="0" marL="0">
+            <a:pPr marL="0" indent="0" algn="ctr">
               <a:buNone/>
             </a:pPr>
             <a:r>
@@ -6607,4 +6723,319 @@
     </a:ext>
   </a:extLst>
 </a:theme>
+</file>
+
+<file path=ppt/theme/theme2.xml><?xml version="1.0" encoding="utf-8"?>
+<a:theme xmlns:a="http://schemas.openxmlformats.org/drawingml/2006/main" name="Office Theme">
+  <a:themeElements>
+    <a:clrScheme name="Office">
+      <a:dk1>
+        <a:sysClr val="windowText" lastClr="000000"/>
+      </a:dk1>
+      <a:lt1>
+        <a:sysClr val="window" lastClr="FFFFFF"/>
+      </a:lt1>
+      <a:dk2>
+        <a:srgbClr val="0E2841"/>
+      </a:dk2>
+      <a:lt2>
+        <a:srgbClr val="E8E8E8"/>
+      </a:lt2>
+      <a:accent1>
+        <a:srgbClr val="156082"/>
+      </a:accent1>
+      <a:accent2>
+        <a:srgbClr val="E97132"/>
+      </a:accent2>
+      <a:accent3>
+        <a:srgbClr val="196B24"/>
+      </a:accent3>
+      <a:accent4>
+        <a:srgbClr val="0F9ED5"/>
+      </a:accent4>
+      <a:accent5>
+        <a:srgbClr val="A02B93"/>
+      </a:accent5>
+      <a:accent6>
+        <a:srgbClr val="4EA72E"/>
+      </a:accent6>
+      <a:hlink>
+        <a:srgbClr val="467886"/>
+      </a:hlink>
+      <a:folHlink>
+        <a:srgbClr val="96607D"/>
+      </a:folHlink>
+    </a:clrScheme>
+    <a:fontScheme name="Office">
+      <a:majorFont>
+        <a:latin typeface="Aptos Display" panose="02110004020202020204"/>
+        <a:ea typeface=""/>
+        <a:cs typeface=""/>
+        <a:font script="Jpan" typeface="游ゴシック Light"/>
+        <a:font script="Hang" typeface="맑은 고딕"/>
+        <a:font script="Hans" typeface="等线 Light"/>
+        <a:font script="Hant" typeface="新細明體"/>
+        <a:font script="Arab" typeface="Times New Roman"/>
+        <a:font script="Hebr" typeface="Times New Roman"/>
+        <a:font script="Thai" typeface="Angsana New"/>
+        <a:font script="Ethi" typeface="Nyala"/>
+        <a:font script="Beng" typeface="Vrinda"/>
+        <a:font script="Gujr" typeface="Shruti"/>
+        <a:font script="Khmr" typeface="MoolBoran"/>
+        <a:font script="Knda" typeface="Tunga"/>
+        <a:font script="Guru" typeface="Raavi"/>
+        <a:font script="Cans" typeface="Euphemia"/>
+        <a:font script="Cher" typeface="Plantagenet Cherokee"/>
+        <a:font script="Yiii" typeface="Microsoft Yi Baiti"/>
+        <a:font script="Tibt" typeface="Microsoft Himalaya"/>
+        <a:font script="Thaa" typeface="MV Boli"/>
+        <a:font script="Deva" typeface="Mangal"/>
+        <a:font script="Telu" typeface="Gautami"/>
+        <a:font script="Taml" typeface="Latha"/>
+        <a:font script="Syrc" typeface="Estrangelo Edessa"/>
+        <a:font script="Orya" typeface="Kalinga"/>
+        <a:font script="Mlym" typeface="Kartika"/>
+        <a:font script="Laoo" typeface="DokChampa"/>
+        <a:font script="Sinh" typeface="Iskoola Pota"/>
+        <a:font script="Mong" typeface="Mongolian Baiti"/>
+        <a:font script="Viet" typeface="Times New Roman"/>
+        <a:font script="Uigh" typeface="Microsoft Uighur"/>
+        <a:font script="Geor" typeface="Sylfaen"/>
+        <a:font script="Armn" typeface="Arial"/>
+        <a:font script="Bugi" typeface="Leelawadee UI"/>
+        <a:font script="Bopo" typeface="Microsoft JhengHei"/>
+        <a:font script="Java" typeface="Javanese Text"/>
+        <a:font script="Lisu" typeface="Segoe UI"/>
+        <a:font script="Mymr" typeface="Myanmar Text"/>
+        <a:font script="Nkoo" typeface="Ebrima"/>
+        <a:font script="Olck" typeface="Nirmala UI"/>
+        <a:font script="Osma" typeface="Ebrima"/>
+        <a:font script="Phag" typeface="Phagspa"/>
+        <a:font script="Syrn" typeface="Estrangelo Edessa"/>
+        <a:font script="Syrj" typeface="Estrangelo Edessa"/>
+        <a:font script="Syre" typeface="Estrangelo Edessa"/>
+        <a:font script="Sora" typeface="Nirmala UI"/>
+        <a:font script="Tale" typeface="Microsoft Tai Le"/>
+        <a:font script="Talu" typeface="Microsoft New Tai Lue"/>
+        <a:font script="Tfng" typeface="Ebrima"/>
+      </a:majorFont>
+      <a:minorFont>
+        <a:latin typeface="Aptos" panose="02110004020202020204"/>
+        <a:ea typeface=""/>
+        <a:cs typeface=""/>
+        <a:font script="Jpan" typeface="游ゴシック"/>
+        <a:font script="Hang" typeface="맑은 고딕"/>
+        <a:font script="Hans" typeface="等线"/>
+        <a:font script="Hant" typeface="新細明體"/>
+        <a:font script="Arab" typeface="Arial"/>
+        <a:font script="Hebr" typeface="Arial"/>
+        <a:font script="Thai" typeface="Cordia New"/>
+        <a:font script="Ethi" typeface="Nyala"/>
+        <a:font script="Beng" typeface="Vrinda"/>
+        <a:font script="Gujr" typeface="Shruti"/>
+        <a:font script="Khmr" typeface="DaunPenh"/>
+        <a:font script="Knda" typeface="Tunga"/>
+        <a:font script="Guru" typeface="Raavi"/>
+        <a:font script="Cans" typeface="Euphemia"/>
+        <a:font script="Cher" typeface="Plantagenet Cherokee"/>
+        <a:font script="Yiii" typeface="Microsoft Yi Baiti"/>
+        <a:font script="Tibt" typeface="Microsoft Himalaya"/>
+        <a:font script="Thaa" typeface="MV Boli"/>
+        <a:font script="Deva" typeface="Mangal"/>
+        <a:font script="Telu" typeface="Gautami"/>
+        <a:font script="Taml" typeface="Latha"/>
+        <a:font script="Syrc" typeface="Estrangelo Edessa"/>
+        <a:font script="Orya" typeface="Kalinga"/>
+        <a:font script="Mlym" typeface="Kartika"/>
+        <a:font script="Laoo" typeface="DokChampa"/>
+        <a:font script="Sinh" typeface="Iskoola Pota"/>
+        <a:font script="Mong" typeface="Mongolian Baiti"/>
+        <a:font script="Viet" typeface="Arial"/>
+        <a:font script="Uigh" typeface="Microsoft Uighur"/>
+        <a:font script="Geor" typeface="Sylfaen"/>
+        <a:font script="Armn" typeface="Arial"/>
+        <a:font script="Bugi" typeface="Leelawadee UI"/>
+        <a:font script="Bopo" typeface="Microsoft JhengHei"/>
+        <a:font script="Java" typeface="Javanese Text"/>
+        <a:font script="Lisu" typeface="Segoe UI"/>
+        <a:font script="Mymr" typeface="Myanmar Text"/>
+        <a:font script="Nkoo" typeface="Ebrima"/>
+        <a:font script="Olck" typeface="Nirmala UI"/>
+        <a:font script="Osma" typeface="Ebrima"/>
+        <a:font script="Phag" typeface="Phagspa"/>
+        <a:font script="Syrn" typeface="Estrangelo Edessa"/>
+        <a:font script="Syrj" typeface="Estrangelo Edessa"/>
+        <a:font script="Syre" typeface="Estrangelo Edessa"/>
+        <a:font script="Sora" typeface="Nirmala UI"/>
+        <a:font script="Tale" typeface="Microsoft Tai Le"/>
+        <a:font script="Talu" typeface="Microsoft New Tai Lue"/>
+        <a:font script="Tfng" typeface="Ebrima"/>
+      </a:minorFont>
+    </a:fontScheme>
+    <a:fmtScheme name="Office">
+      <a:fillStyleLst>
+        <a:solidFill>
+          <a:schemeClr val="phClr"/>
+        </a:solidFill>
+        <a:gradFill rotWithShape="1">
+          <a:gsLst>
+            <a:gs pos="0">
+              <a:schemeClr val="phClr">
+                <a:lumMod val="110000"/>
+                <a:satMod val="105000"/>
+                <a:tint val="67000"/>
+              </a:schemeClr>
+            </a:gs>
+            <a:gs pos="50000">
+              <a:schemeClr val="phClr">
+                <a:lumMod val="105000"/>
+                <a:satMod val="103000"/>
+                <a:tint val="73000"/>
+              </a:schemeClr>
+            </a:gs>
+            <a:gs pos="100000">
+              <a:schemeClr val="phClr">
+                <a:lumMod val="105000"/>
+                <a:satMod val="109000"/>
+                <a:tint val="81000"/>
+              </a:schemeClr>
+            </a:gs>
+          </a:gsLst>
+          <a:lin ang="5400000" scaled="0"/>
+        </a:gradFill>
+        <a:gradFill rotWithShape="1">
+          <a:gsLst>
+            <a:gs pos="0">
+              <a:schemeClr val="phClr">
+                <a:satMod val="103000"/>
+                <a:lumMod val="102000"/>
+                <a:tint val="94000"/>
+              </a:schemeClr>
+            </a:gs>
+            <a:gs pos="50000">
+              <a:schemeClr val="phClr">
+                <a:satMod val="110000"/>
+                <a:lumMod val="100000"/>
+                <a:shade val="100000"/>
+              </a:schemeClr>
+            </a:gs>
+            <a:gs pos="100000">
+              <a:schemeClr val="phClr">
+                <a:lumMod val="99000"/>
+                <a:satMod val="120000"/>
+                <a:shade val="78000"/>
+              </a:schemeClr>
+            </a:gs>
+          </a:gsLst>
+          <a:lin ang="5400000" scaled="0"/>
+        </a:gradFill>
+      </a:fillStyleLst>
+      <a:lnStyleLst>
+        <a:ln w="12700" cap="flat" cmpd="sng" algn="ctr">
+          <a:solidFill>
+            <a:schemeClr val="phClr"/>
+          </a:solidFill>
+          <a:prstDash val="solid"/>
+          <a:miter lim="800000"/>
+        </a:ln>
+        <a:ln w="19050" cap="flat" cmpd="sng" algn="ctr">
+          <a:solidFill>
+            <a:schemeClr val="phClr"/>
+          </a:solidFill>
+          <a:prstDash val="solid"/>
+          <a:miter lim="800000"/>
+        </a:ln>
+        <a:ln w="25400" cap="flat" cmpd="sng" algn="ctr">
+          <a:solidFill>
+            <a:schemeClr val="phClr"/>
+          </a:solidFill>
+          <a:prstDash val="solid"/>
+          <a:miter lim="800000"/>
+        </a:ln>
+      </a:lnStyleLst>
+      <a:effectStyleLst>
+        <a:effectStyle>
+          <a:effectLst/>
+        </a:effectStyle>
+        <a:effectStyle>
+          <a:effectLst/>
+        </a:effectStyle>
+        <a:effectStyle>
+          <a:effectLst>
+            <a:outerShdw blurRad="57150" dist="19050" dir="5400000" algn="ctr" rotWithShape="0">
+              <a:srgbClr val="000000">
+                <a:alpha val="63000"/>
+              </a:srgbClr>
+            </a:outerShdw>
+          </a:effectLst>
+        </a:effectStyle>
+      </a:effectStyleLst>
+      <a:bgFillStyleLst>
+        <a:solidFill>
+          <a:schemeClr val="phClr"/>
+        </a:solidFill>
+        <a:solidFill>
+          <a:schemeClr val="phClr">
+            <a:tint val="95000"/>
+            <a:satMod val="170000"/>
+          </a:schemeClr>
+        </a:solidFill>
+        <a:gradFill rotWithShape="1">
+          <a:gsLst>
+            <a:gs pos="0">
+              <a:schemeClr val="phClr">
+                <a:tint val="93000"/>
+                <a:satMod val="150000"/>
+                <a:shade val="98000"/>
+                <a:lumMod val="102000"/>
+              </a:schemeClr>
+            </a:gs>
+            <a:gs pos="50000">
+              <a:schemeClr val="phClr">
+                <a:tint val="98000"/>
+                <a:satMod val="130000"/>
+                <a:shade val="90000"/>
+                <a:lumMod val="103000"/>
+              </a:schemeClr>
+            </a:gs>
+            <a:gs pos="100000">
+              <a:schemeClr val="phClr">
+                <a:shade val="63000"/>
+                <a:satMod val="120000"/>
+              </a:schemeClr>
+            </a:gs>
+          </a:gsLst>
+          <a:lin ang="5400000" scaled="0"/>
+        </a:gradFill>
+      </a:bgFillStyleLst>
+    </a:fmtScheme>
+  </a:themeElements>
+  <a:objectDefaults>
+    <a:lnDef>
+      <a:spPr/>
+      <a:bodyPr/>
+      <a:lstStyle/>
+      <a:style>
+        <a:lnRef idx="2">
+          <a:schemeClr val="accent1"/>
+        </a:lnRef>
+        <a:fillRef idx="0">
+          <a:schemeClr val="accent1"/>
+        </a:fillRef>
+        <a:effectRef idx="1">
+          <a:schemeClr val="accent1"/>
+        </a:effectRef>
+        <a:fontRef idx="minor">
+          <a:schemeClr val="tx1"/>
+        </a:fontRef>
+      </a:style>
+    </a:lnDef>
+  </a:objectDefaults>
+  <a:extraClrSchemeLst/>
+  <a:extLst>
+    <a:ext uri="{05A4C25C-085E-4340-85A3-A5531E510DB2}">
+      <thm15:themeFamily xmlns:thm15="http://schemas.microsoft.com/office/thememl/2012/main" name="Office Theme" id="{2E142A2C-CD16-42D6-873A-C26D2A0506FA}" vid="{1BDDFF52-6CD6-40A5-AB3C-68EB2F1E4D0A}"/>
+    </a:ext>
+  </a:extLst>
+</a:theme>
 </file>